--- a/modulo-02/02.01 - Analisando e Testando Código/02.01_Analisando_e_testando_código.pptx
+++ b/modulo-02/02.01 - Analisando e Testando Código/02.01_Analisando_e_testando_código.pptx
@@ -1728,7 +1728,7 @@
                   <a:srgbClr val="8FA3C7"/>
                 </a:solidFill>
               </a:rPr>
-              <a:t>ABAP Moderno · Módulo 04 — Programação ABAP Intermediária  ·  Aula 1 de 9 — Analisar e testar código</a:t>
+              <a:t>ABAP Moderno · Módulo 02 — Programação ABAP Intermediária  ·  Aula 1 de 9 — Analisar e testar código</a:t>
             </a:r>
             <a:endParaRPr lang="en-US" sz="900" dirty="0"/>
           </a:p>
@@ -1874,7 +1874,7 @@
                   <a:srgbClr val="556B82"/>
                 </a:solidFill>
               </a:rPr>
-              <a:t>ABAP Moderno · Módulo 04 — Programação ABAP Intermediária  ·  Aula 1 de 9 — Analisar e testar código</a:t>
+              <a:t>ABAP Moderno · Módulo 02 — Programação ABAP Intermediária  ·  Aula 1 de 9 — Analisar e testar código</a:t>
             </a:r>
             <a:endParaRPr lang="en-US" sz="900" dirty="0"/>
           </a:p>
@@ -2305,7 +2305,7 @@
                   <a:srgbClr val="89D1FF"/>
                 </a:solidFill>
               </a:rPr>
-              <a:t>MÓDULO 04 · AULA 01 DE 09</a:t>
+              <a:t>MÓDULO 02 · AULA 01 DE 09</a:t>
             </a:r>
             <a:endParaRPr lang="en-US" sz="1400" dirty="0"/>
           </a:p>
@@ -2691,7 +2691,7 @@
                   <a:srgbClr val="8FA3C7"/>
                 </a:solidFill>
               </a:rPr>
-              <a:t>ABAP Moderno · Módulo 04 — Programação ABAP Intermediária · Design System SAP Horizon</a:t>
+              <a:t>ABAP Moderno · Módulo 02 — Programação ABAP Intermediária · Design System SAP Horizon</a:t>
             </a:r>
             <a:endParaRPr lang="en-US" sz="1100" dirty="0"/>
           </a:p>
@@ -2798,7 +2798,7 @@
                   <a:srgbClr val="89D1FF"/>
                 </a:solidFill>
               </a:rPr>
-              <a:t>AULA 04.01 · SEÇÃO 3</a:t>
+              <a:t>AULA 02.01 · SEÇÃO 3</a:t>
             </a:r>
             <a:endParaRPr lang="en-US" sz="1300" dirty="0"/>
           </a:p>
@@ -4772,7 +4772,7 @@
                   <a:srgbClr val="1D2D3E"/>
                 </a:solidFill>
               </a:rPr>
-              <a:t> (aula 04.04).</a:t>
+              <a:t> (aula 02.04).</a:t>
             </a:r>
             <a:endParaRPr lang="en-US" sz="1400" dirty="0"/>
           </a:p>
@@ -4794,7 +4794,7 @@
         </p:blipFill>
         <p:spPr>
           <a:xfrm>
-            <a:off x="5446624" y="3241548"/>
+            <a:off x="2622728" y="3241548"/>
             <a:ext cx="329184" cy="329184"/>
           </a:xfrm>
           <a:prstGeom prst="rect">
@@ -4818,7 +4818,7 @@
         </p:blipFill>
         <p:spPr>
           <a:xfrm>
-            <a:off x="2622728" y="3241548"/>
+            <a:off x="8270519" y="3241548"/>
             <a:ext cx="329184" cy="329184"/>
           </a:xfrm>
           <a:prstGeom prst="rect">
@@ -4842,7 +4842,7 @@
         </p:blipFill>
         <p:spPr>
           <a:xfrm>
-            <a:off x="8270519" y="3241548"/>
+            <a:off x="5446624" y="3241548"/>
             <a:ext cx="329184" cy="329184"/>
           </a:xfrm>
           <a:prstGeom prst="rect">
@@ -4866,8 +4866,8 @@
         </p:blipFill>
         <p:spPr>
           <a:xfrm>
-            <a:off x="11094415" y="3241548"/>
-            <a:ext cx="329184" cy="329184"/>
+            <a:off x="749808" y="5161788"/>
+            <a:ext cx="310896" cy="310896"/>
           </a:xfrm>
           <a:prstGeom prst="rect">
             <a:avLst/>
@@ -4890,8 +4890,8 @@
         </p:blipFill>
         <p:spPr>
           <a:xfrm>
-            <a:off x="749808" y="5161788"/>
-            <a:ext cx="310896" cy="310896"/>
+            <a:off x="11094415" y="3241548"/>
+            <a:ext cx="329184" cy="329184"/>
           </a:xfrm>
           <a:prstGeom prst="rect">
             <a:avLst/>
@@ -5034,7 +5034,7 @@
                   <a:srgbClr val="FFFFFF"/>
                 </a:solidFill>
               </a:rPr>
-              <a:t>O que aprendemos na aula 04.01</a:t>
+              <a:t>O que aprendemos na aula 02.01</a:t>
             </a:r>
             <a:endParaRPr lang="en-US" sz="3200" dirty="0"/>
           </a:p>
@@ -5639,7 +5639,7 @@
                   <a:srgbClr val="89D1FF"/>
                 </a:solidFill>
               </a:rPr>
-              <a:t>Próxima aula · 04.02  </a:t>
+              <a:t>Próxima aula · 02.02  </a:t>
             </a:r>
             <a:r>
               <a:rPr lang="en-US" sz="1500" dirty="0">
@@ -5916,7 +5916,7 @@
                   <a:srgbClr val="1D2D3E"/>
                 </a:solidFill>
               </a:rPr>
-              <a:t>Módulo 04 em 9 aulas: ABAP intermediário</a:t>
+              <a:t>Módulo 02 em 9 aulas: ABAP intermediário</a:t>
             </a:r>
             <a:endParaRPr lang="en-US" sz="2800" dirty="0"/>
           </a:p>
@@ -7520,7 +7520,7 @@
         </p:blipFill>
         <p:spPr>
           <a:xfrm>
-            <a:off x="2072579" y="1847088"/>
+            <a:off x="6583497" y="1847088"/>
             <a:ext cx="347472" cy="347472"/>
           </a:xfrm>
           <a:prstGeom prst="rect">
@@ -7544,7 +7544,7 @@
         </p:blipFill>
         <p:spPr>
           <a:xfrm>
-            <a:off x="4328038" y="1847088"/>
+            <a:off x="2072579" y="1847088"/>
             <a:ext cx="347472" cy="347472"/>
           </a:xfrm>
           <a:prstGeom prst="rect">
@@ -7568,7 +7568,7 @@
         </p:blipFill>
         <p:spPr>
           <a:xfrm>
-            <a:off x="6583497" y="1847088"/>
+            <a:off x="4328038" y="1847088"/>
             <a:ext cx="347472" cy="347472"/>
           </a:xfrm>
           <a:prstGeom prst="rect">
@@ -7592,7 +7592,7 @@
         </p:blipFill>
         <p:spPr>
           <a:xfrm>
-            <a:off x="8838956" y="1847088"/>
+            <a:off x="2072579" y="3858768"/>
             <a:ext cx="347472" cy="347472"/>
           </a:xfrm>
           <a:prstGeom prst="rect">
@@ -7616,7 +7616,7 @@
         </p:blipFill>
         <p:spPr>
           <a:xfrm>
-            <a:off x="11094415" y="1847088"/>
+            <a:off x="8838956" y="1847088"/>
             <a:ext cx="347472" cy="347472"/>
           </a:xfrm>
           <a:prstGeom prst="rect">
@@ -7640,7 +7640,7 @@
         </p:blipFill>
         <p:spPr>
           <a:xfrm>
-            <a:off x="4328038" y="3858768"/>
+            <a:off x="11094415" y="1847088"/>
             <a:ext cx="347472" cy="347472"/>
           </a:xfrm>
           <a:prstGeom prst="rect">
@@ -7664,7 +7664,7 @@
         </p:blipFill>
         <p:spPr>
           <a:xfrm>
-            <a:off x="2072579" y="3858768"/>
+            <a:off x="4328038" y="3858768"/>
             <a:ext cx="347472" cy="347472"/>
           </a:xfrm>
           <a:prstGeom prst="rect">
@@ -7712,8 +7712,8 @@
         </p:blipFill>
         <p:spPr>
           <a:xfrm>
-            <a:off x="8838956" y="3858768"/>
-            <a:ext cx="347472" cy="347472"/>
+            <a:off x="749808" y="5751576"/>
+            <a:ext cx="310896" cy="310896"/>
           </a:xfrm>
           <a:prstGeom prst="rect">
             <a:avLst/>
@@ -7736,8 +7736,8 @@
         </p:blipFill>
         <p:spPr>
           <a:xfrm>
-            <a:off x="749808" y="5751576"/>
-            <a:ext cx="310896" cy="310896"/>
+            <a:off x="8838956" y="3858768"/>
+            <a:ext cx="347472" cy="347472"/>
           </a:xfrm>
           <a:prstGeom prst="rect">
             <a:avLst/>
@@ -8649,7 +8649,7 @@
                   <a:srgbClr val="89D1FF"/>
                 </a:solidFill>
               </a:rPr>
-              <a:t>AULA 04.01 · SEÇÃO 1</a:t>
+              <a:t>AULA 02.01 · SEÇÃO 1</a:t>
             </a:r>
             <a:endParaRPr lang="en-US" sz="1300" dirty="0"/>
           </a:p>
@@ -10074,7 +10074,7 @@
                   <a:srgbClr val="FFFFFF"/>
                 </a:solidFill>
               </a:rPr>
-              <a:t>zcl_04_atc.clas.abap</a:t>
+              <a:t>zcl_02_atc.clas.abap</a:t>
             </a:r>
             <a:endParaRPr lang="en-US" sz="950" dirty="0"/>
           </a:p>
@@ -10110,7 +10110,7 @@
                   <a:srgbClr val="9DA5B4"/>
                 </a:solidFill>
               </a:rPr>
-              <a:t>ZS4D401_## › ZCL_04_ATC</a:t>
+              <a:t>ZS4D401_## › ZCL_02_ATC</a:t>
             </a:r>
             <a:endParaRPr lang="en-US" sz="850" dirty="0"/>
           </a:p>
@@ -11454,7 +11454,7 @@
                   <a:srgbClr val="89D1FF"/>
                 </a:solidFill>
               </a:rPr>
-              <a:t>AULA 04.01 · SEÇÃO 2</a:t>
+              <a:t>AULA 02.01 · SEÇÃO 2</a:t>
             </a:r>
             <a:endParaRPr lang="en-US" sz="1300" dirty="0"/>
           </a:p>
@@ -12038,7 +12038,7 @@
                   <a:srgbClr val="FFFFFF"/>
                 </a:solidFill>
               </a:rPr>
-              <a:t>zcl_04_calc.clas.testclasses.abap</a:t>
+              <a:t>zcl_pc_util.clas.testclasses.abap</a:t>
             </a:r>
             <a:endParaRPr lang="en-US" sz="950" dirty="0"/>
           </a:p>
@@ -12074,7 +12074,7 @@
                   <a:srgbClr val="9DA5B4"/>
                 </a:solidFill>
               </a:rPr>
-              <a:t>ZCL_04_CALC › aba Test Classes</a:t>
+              <a:t>ZAVBS_PC_COMMON › ZCL_PC_UTIL › aba Test Classes (trecho)</a:t>
             </a:r>
             <a:endParaRPr lang="en-US" sz="850" dirty="0"/>
           </a:p>
@@ -12540,66 +12540,6 @@
             </a:r>
             <a:endParaRPr lang="en-US" sz="900" dirty="0"/>
           </a:p>
-          <a:p>
-            <a:pPr algn="r" indent="0" marL="0">
-              <a:lnSpc>
-                <a:spcPct val="105000"/>
-              </a:lnSpc>
-              <a:buNone/>
-            </a:pPr>
-            <a:r>
-              <a:rPr lang="en-US" sz="900" dirty="0">
-                <a:solidFill>
-                  <a:srgbClr val="6E7681"/>
-                </a:solidFill>
-                <a:latin typeface="Courier New" pitchFamily="34" charset="0"/>
-                <a:ea typeface="Courier New" pitchFamily="34" charset="-122"/>
-                <a:cs typeface="Courier New" pitchFamily="34" charset="-120"/>
-              </a:rPr>
-              <a:t>23</a:t>
-            </a:r>
-            <a:endParaRPr lang="en-US" sz="900" dirty="0"/>
-          </a:p>
-          <a:p>
-            <a:pPr algn="r" indent="0" marL="0">
-              <a:lnSpc>
-                <a:spcPct val="105000"/>
-              </a:lnSpc>
-              <a:buNone/>
-            </a:pPr>
-            <a:r>
-              <a:rPr lang="en-US" sz="900" dirty="0">
-                <a:solidFill>
-                  <a:srgbClr val="6E7681"/>
-                </a:solidFill>
-                <a:latin typeface="Courier New" pitchFamily="34" charset="0"/>
-                <a:ea typeface="Courier New" pitchFamily="34" charset="-122"/>
-                <a:cs typeface="Courier New" pitchFamily="34" charset="-120"/>
-              </a:rPr>
-              <a:t>24</a:t>
-            </a:r>
-            <a:endParaRPr lang="en-US" sz="900" dirty="0"/>
-          </a:p>
-          <a:p>
-            <a:pPr algn="r" indent="0" marL="0">
-              <a:lnSpc>
-                <a:spcPct val="105000"/>
-              </a:lnSpc>
-              <a:buNone/>
-            </a:pPr>
-            <a:r>
-              <a:rPr lang="en-US" sz="900" dirty="0">
-                <a:solidFill>
-                  <a:srgbClr val="6E7681"/>
-                </a:solidFill>
-                <a:latin typeface="Courier New" pitchFamily="34" charset="0"/>
-                <a:ea typeface="Courier New" pitchFamily="34" charset="-122"/>
-                <a:cs typeface="Courier New" pitchFamily="34" charset="-120"/>
-              </a:rPr>
-              <a:t>25</a:t>
-            </a:r>
-            <a:endParaRPr lang="en-US" sz="900" dirty="0"/>
-          </a:p>
         </p:txBody>
       </p:sp>
       <p:sp>
@@ -12660,7 +12600,7 @@
                 <a:ea typeface="Courier New" pitchFamily="34" charset="-122"/>
                 <a:cs typeface="Courier New" pitchFamily="34" charset="-120"/>
               </a:rPr>
-              <a:t>ltcl_calc</a:t>
+              <a:t>ltcl_digitos_cpf</a:t>
             </a:r>
             <a:r>
               <a:rPr lang="en-US" sz="900" dirty="0">
@@ -12803,83 +12743,6 @@
               </a:rPr>
               <a:t>SHORT</a:t>
             </a:r>
-            <a:r>
-              <a:rPr lang="en-US" sz="900" dirty="0">
-                <a:solidFill>
-                  <a:srgbClr val="CCCCCC"/>
-                </a:solidFill>
-                <a:latin typeface="Courier New" pitchFamily="34" charset="0"/>
-                <a:ea typeface="Courier New" pitchFamily="34" charset="-122"/>
-                <a:cs typeface="Courier New" pitchFamily="34" charset="-120"/>
-              </a:rPr>
-              <a:t> </a:t>
-            </a:r>
-            <a:r>
-              <a:rPr lang="en-US" sz="900" dirty="0">
-                <a:solidFill>
-                  <a:srgbClr val="CCCCCC"/>
-                </a:solidFill>
-                <a:latin typeface="Courier New" pitchFamily="34" charset="0"/>
-                <a:ea typeface="Courier New" pitchFamily="34" charset="-122"/>
-                <a:cs typeface="Courier New" pitchFamily="34" charset="-120"/>
-              </a:rPr>
-              <a:t>RISK</a:t>
-            </a:r>
-            <a:r>
-              <a:rPr lang="en-US" sz="900" dirty="0">
-                <a:solidFill>
-                  <a:srgbClr val="CCCCCC"/>
-                </a:solidFill>
-                <a:latin typeface="Courier New" pitchFamily="34" charset="0"/>
-                <a:ea typeface="Courier New" pitchFamily="34" charset="-122"/>
-                <a:cs typeface="Courier New" pitchFamily="34" charset="-120"/>
-              </a:rPr>
-              <a:t> </a:t>
-            </a:r>
-            <a:r>
-              <a:rPr lang="en-US" sz="900" dirty="0">
-                <a:solidFill>
-                  <a:srgbClr val="CCCCCC"/>
-                </a:solidFill>
-                <a:latin typeface="Courier New" pitchFamily="34" charset="0"/>
-                <a:ea typeface="Courier New" pitchFamily="34" charset="-122"/>
-                <a:cs typeface="Courier New" pitchFamily="34" charset="-120"/>
-              </a:rPr>
-              <a:t>LEVEL</a:t>
-            </a:r>
-            <a:r>
-              <a:rPr lang="en-US" sz="900" dirty="0">
-                <a:solidFill>
-                  <a:srgbClr val="CCCCCC"/>
-                </a:solidFill>
-                <a:latin typeface="Courier New" pitchFamily="34" charset="0"/>
-                <a:ea typeface="Courier New" pitchFamily="34" charset="-122"/>
-                <a:cs typeface="Courier New" pitchFamily="34" charset="-120"/>
-              </a:rPr>
-              <a:t> </a:t>
-            </a:r>
-            <a:r>
-              <a:rPr lang="en-US" sz="900" dirty="0">
-                <a:solidFill>
-                  <a:srgbClr val="CCCCCC"/>
-                </a:solidFill>
-                <a:latin typeface="Courier New" pitchFamily="34" charset="0"/>
-                <a:ea typeface="Courier New" pitchFamily="34" charset="-122"/>
-                <a:cs typeface="Courier New" pitchFamily="34" charset="-120"/>
-              </a:rPr>
-              <a:t>HARMLESS</a:t>
-            </a:r>
-            <a:r>
-              <a:rPr lang="en-US" sz="900" dirty="0">
-                <a:solidFill>
-                  <a:srgbClr val="CCCCCC"/>
-                </a:solidFill>
-                <a:latin typeface="Courier New" pitchFamily="34" charset="0"/>
-                <a:ea typeface="Courier New" pitchFamily="34" charset="-122"/>
-                <a:cs typeface="Courier New" pitchFamily="34" charset="-120"/>
-              </a:rPr>
-              <a:t>.</a:t>
-            </a:r>
             <a:endParaRPr lang="en-US" sz="900" dirty="0"/>
           </a:p>
           <a:p>
@@ -12903,13 +12766,13 @@
             <a:r>
               <a:rPr lang="en-US" sz="900" dirty="0">
                 <a:solidFill>
-                  <a:srgbClr val="569CD6"/>
-                </a:solidFill>
-                <a:latin typeface="Courier New" pitchFamily="34" charset="0"/>
-                <a:ea typeface="Courier New" pitchFamily="34" charset="-122"/>
-                <a:cs typeface="Courier New" pitchFamily="34" charset="-120"/>
-              </a:rPr>
-              <a:t>PRIVATE</a:t>
+                  <a:srgbClr val="CCCCCC"/>
+                </a:solidFill>
+                <a:latin typeface="Courier New" pitchFamily="34" charset="0"/>
+                <a:ea typeface="Courier New" pitchFamily="34" charset="-122"/>
+                <a:cs typeface="Courier New" pitchFamily="34" charset="-120"/>
+              </a:rPr>
+              <a:t>RISK</a:t>
             </a:r>
             <a:r>
               <a:rPr lang="en-US" sz="900" dirty="0">
@@ -12925,13 +12788,35 @@
             <a:r>
               <a:rPr lang="en-US" sz="900" dirty="0">
                 <a:solidFill>
-                  <a:srgbClr val="569CD6"/>
-                </a:solidFill>
-                <a:latin typeface="Courier New" pitchFamily="34" charset="0"/>
-                <a:ea typeface="Courier New" pitchFamily="34" charset="-122"/>
-                <a:cs typeface="Courier New" pitchFamily="34" charset="-120"/>
-              </a:rPr>
-              <a:t>SECTION</a:t>
+                  <a:srgbClr val="CCCCCC"/>
+                </a:solidFill>
+                <a:latin typeface="Courier New" pitchFamily="34" charset="0"/>
+                <a:ea typeface="Courier New" pitchFamily="34" charset="-122"/>
+                <a:cs typeface="Courier New" pitchFamily="34" charset="-120"/>
+              </a:rPr>
+              <a:t>LEVEL</a:t>
+            </a:r>
+            <a:r>
+              <a:rPr lang="en-US" sz="900" dirty="0">
+                <a:solidFill>
+                  <a:srgbClr val="CCCCCC"/>
+                </a:solidFill>
+                <a:latin typeface="Courier New" pitchFamily="34" charset="0"/>
+                <a:ea typeface="Courier New" pitchFamily="34" charset="-122"/>
+                <a:cs typeface="Courier New" pitchFamily="34" charset="-120"/>
+              </a:rPr>
+              <a:t> </a:t>
+            </a:r>
+            <a:r>
+              <a:rPr lang="en-US" sz="900" dirty="0">
+                <a:solidFill>
+                  <a:srgbClr val="CCCCCC"/>
+                </a:solidFill>
+                <a:latin typeface="Courier New" pitchFamily="34" charset="0"/>
+                <a:ea typeface="Courier New" pitchFamily="34" charset="-122"/>
+                <a:cs typeface="Courier New" pitchFamily="34" charset="-120"/>
+              </a:rPr>
+              <a:t>HARMLESS</a:t>
             </a:r>
             <a:r>
               <a:rPr lang="en-US" sz="900" dirty="0">
@@ -12962,7 +12847,7 @@
                 <a:ea typeface="Courier New" pitchFamily="34" charset="-122"/>
                 <a:cs typeface="Courier New" pitchFamily="34" charset="-120"/>
               </a:rPr>
-              <a:t>    </a:t>
+              <a:t>  </a:t>
             </a:r>
             <a:r>
               <a:rPr lang="en-US" sz="900" dirty="0">
@@ -12973,7 +12858,7 @@
                 <a:ea typeface="Courier New" pitchFamily="34" charset="-122"/>
                 <a:cs typeface="Courier New" pitchFamily="34" charset="-120"/>
               </a:rPr>
-              <a:t>DATA</a:t>
+              <a:t>PRIVATE</a:t>
             </a:r>
             <a:r>
               <a:rPr lang="en-US" sz="900" dirty="0">
@@ -12989,134 +12874,24 @@
             <a:r>
               <a:rPr lang="en-US" sz="900" dirty="0">
                 <a:solidFill>
+                  <a:srgbClr val="569CD6"/>
+                </a:solidFill>
+                <a:latin typeface="Courier New" pitchFamily="34" charset="0"/>
+                <a:ea typeface="Courier New" pitchFamily="34" charset="-122"/>
+                <a:cs typeface="Courier New" pitchFamily="34" charset="-120"/>
+              </a:rPr>
+              <a:t>SECTION</a:t>
+            </a:r>
+            <a:r>
+              <a:rPr lang="en-US" sz="900" dirty="0">
+                <a:solidFill>
                   <a:srgbClr val="CCCCCC"/>
                 </a:solidFill>
                 <a:latin typeface="Courier New" pitchFamily="34" charset="0"/>
                 <a:ea typeface="Courier New" pitchFamily="34" charset="-122"/>
                 <a:cs typeface="Courier New" pitchFamily="34" charset="-120"/>
               </a:rPr>
-              <a:t>cut</a:t>
-            </a:r>
-            <a:r>
-              <a:rPr lang="en-US" sz="900" dirty="0">
-                <a:solidFill>
-                  <a:srgbClr val="CCCCCC"/>
-                </a:solidFill>
-                <a:latin typeface="Courier New" pitchFamily="34" charset="0"/>
-                <a:ea typeface="Courier New" pitchFamily="34" charset="-122"/>
-                <a:cs typeface="Courier New" pitchFamily="34" charset="-120"/>
-              </a:rPr>
-              <a:t> </a:t>
-            </a:r>
-            <a:r>
-              <a:rPr lang="en-US" sz="900" dirty="0">
-                <a:solidFill>
-                  <a:srgbClr val="569CD6"/>
-                </a:solidFill>
-                <a:latin typeface="Courier New" pitchFamily="34" charset="0"/>
-                <a:ea typeface="Courier New" pitchFamily="34" charset="-122"/>
-                <a:cs typeface="Courier New" pitchFamily="34" charset="-120"/>
-              </a:rPr>
-              <a:t>TYPE</a:t>
-            </a:r>
-            <a:r>
-              <a:rPr lang="en-US" sz="900" dirty="0">
-                <a:solidFill>
-                  <a:srgbClr val="CCCCCC"/>
-                </a:solidFill>
-                <a:latin typeface="Courier New" pitchFamily="34" charset="0"/>
-                <a:ea typeface="Courier New" pitchFamily="34" charset="-122"/>
-                <a:cs typeface="Courier New" pitchFamily="34" charset="-120"/>
-              </a:rPr>
-              <a:t> </a:t>
-            </a:r>
-            <a:r>
-              <a:rPr lang="en-US" sz="900" dirty="0">
-                <a:solidFill>
-                  <a:srgbClr val="569CD6"/>
-                </a:solidFill>
-                <a:latin typeface="Courier New" pitchFamily="34" charset="0"/>
-                <a:ea typeface="Courier New" pitchFamily="34" charset="-122"/>
-                <a:cs typeface="Courier New" pitchFamily="34" charset="-120"/>
-              </a:rPr>
-              <a:t>REF</a:t>
-            </a:r>
-            <a:r>
-              <a:rPr lang="en-US" sz="900" dirty="0">
-                <a:solidFill>
-                  <a:srgbClr val="CCCCCC"/>
-                </a:solidFill>
-                <a:latin typeface="Courier New" pitchFamily="34" charset="0"/>
-                <a:ea typeface="Courier New" pitchFamily="34" charset="-122"/>
-                <a:cs typeface="Courier New" pitchFamily="34" charset="-120"/>
-              </a:rPr>
-              <a:t> </a:t>
-            </a:r>
-            <a:r>
-              <a:rPr lang="en-US" sz="900" dirty="0">
-                <a:solidFill>
-                  <a:srgbClr val="569CD6"/>
-                </a:solidFill>
-                <a:latin typeface="Courier New" pitchFamily="34" charset="0"/>
-                <a:ea typeface="Courier New" pitchFamily="34" charset="-122"/>
-                <a:cs typeface="Courier New" pitchFamily="34" charset="-120"/>
-              </a:rPr>
-              <a:t>TO</a:t>
-            </a:r>
-            <a:r>
-              <a:rPr lang="en-US" sz="900" dirty="0">
-                <a:solidFill>
-                  <a:srgbClr val="CCCCCC"/>
-                </a:solidFill>
-                <a:latin typeface="Courier New" pitchFamily="34" charset="0"/>
-                <a:ea typeface="Courier New" pitchFamily="34" charset="-122"/>
-                <a:cs typeface="Courier New" pitchFamily="34" charset="-120"/>
-              </a:rPr>
-              <a:t> </a:t>
-            </a:r>
-            <a:r>
-              <a:rPr lang="en-US" sz="900" dirty="0">
-                <a:solidFill>
-                  <a:srgbClr val="4EC9B0"/>
-                </a:solidFill>
-                <a:latin typeface="Courier New" pitchFamily="34" charset="0"/>
-                <a:ea typeface="Courier New" pitchFamily="34" charset="-122"/>
-                <a:cs typeface="Courier New" pitchFamily="34" charset="-120"/>
-              </a:rPr>
-              <a:t>zcl_04_calc</a:t>
-            </a:r>
-            <a:r>
-              <a:rPr lang="en-US" sz="900" dirty="0">
-                <a:solidFill>
-                  <a:srgbClr val="CCCCCC"/>
-                </a:solidFill>
-                <a:latin typeface="Courier New" pitchFamily="34" charset="0"/>
-                <a:ea typeface="Courier New" pitchFamily="34" charset="-122"/>
-                <a:cs typeface="Courier New" pitchFamily="34" charset="-120"/>
-              </a:rPr>
               <a:t>.</a:t>
-            </a:r>
-            <a:r>
-              <a:rPr lang="en-US" sz="900" dirty="0">
-                <a:solidFill>
-                  <a:srgbClr val="CCCCCC"/>
-                </a:solidFill>
-                <a:latin typeface="Courier New" pitchFamily="34" charset="0"/>
-                <a:ea typeface="Courier New" pitchFamily="34" charset="-122"/>
-                <a:cs typeface="Courier New" pitchFamily="34" charset="-120"/>
-              </a:rPr>
-              <a:t>   </a:t>
-            </a:r>
-            <a:r>
-              <a:rPr lang="en-US" sz="900" i="1" dirty="0">
-                <a:solidFill>
-                  <a:srgbClr val="6A9955"/>
-                </a:solidFill>
-                <a:latin typeface="Courier New" pitchFamily="34" charset="0"/>
-                <a:ea typeface="Courier New" pitchFamily="34" charset="-122"/>
-                <a:cs typeface="Courier New" pitchFamily="34" charset="-120"/>
-              </a:rPr>
-              <a:t>" code under test</a:t>
             </a:r>
             <a:endParaRPr lang="en-US" sz="900" dirty="0"/>
           </a:p>
@@ -13169,7 +12944,51 @@
                 <a:ea typeface="Courier New" pitchFamily="34" charset="-122"/>
                 <a:cs typeface="Courier New" pitchFamily="34" charset="-120"/>
               </a:rPr>
-              <a:t>setup</a:t>
+              <a:t>cpf_valido_sem_mascara</a:t>
+            </a:r>
+            <a:r>
+              <a:rPr lang="en-US" sz="900" dirty="0">
+                <a:solidFill>
+                  <a:srgbClr val="CCCCCC"/>
+                </a:solidFill>
+                <a:latin typeface="Courier New" pitchFamily="34" charset="0"/>
+                <a:ea typeface="Courier New" pitchFamily="34" charset="-122"/>
+                <a:cs typeface="Courier New" pitchFamily="34" charset="-120"/>
+              </a:rPr>
+              <a:t>        </a:t>
+            </a:r>
+            <a:r>
+              <a:rPr lang="en-US" sz="900" dirty="0">
+                <a:solidFill>
+                  <a:srgbClr val="569CD6"/>
+                </a:solidFill>
+                <a:latin typeface="Courier New" pitchFamily="34" charset="0"/>
+                <a:ea typeface="Courier New" pitchFamily="34" charset="-122"/>
+                <a:cs typeface="Courier New" pitchFamily="34" charset="-120"/>
+              </a:rPr>
+              <a:t>FOR</a:t>
+            </a:r>
+            <a:r>
+              <a:rPr lang="en-US" sz="900" dirty="0">
+                <a:solidFill>
+                  <a:srgbClr val="CCCCCC"/>
+                </a:solidFill>
+                <a:latin typeface="Courier New" pitchFamily="34" charset="0"/>
+                <a:ea typeface="Courier New" pitchFamily="34" charset="-122"/>
+                <a:cs typeface="Courier New" pitchFamily="34" charset="-120"/>
+              </a:rPr>
+              <a:t> </a:t>
+            </a:r>
+            <a:r>
+              <a:rPr lang="en-US" sz="900" dirty="0">
+                <a:solidFill>
+                  <a:srgbClr val="CCCCCC"/>
+                </a:solidFill>
+                <a:latin typeface="Courier New" pitchFamily="34" charset="0"/>
+                <a:ea typeface="Courier New" pitchFamily="34" charset="-122"/>
+                <a:cs typeface="Courier New" pitchFamily="34" charset="-120"/>
+              </a:rPr>
+              <a:t>TESTING</a:t>
             </a:r>
             <a:r>
               <a:rPr lang="en-US" sz="900" dirty="0">
@@ -13233,7 +13052,7 @@
                 <a:ea typeface="Courier New" pitchFamily="34" charset="-122"/>
                 <a:cs typeface="Courier New" pitchFamily="34" charset="-120"/>
               </a:rPr>
-              <a:t>divide_ok</a:t>
+              <a:t>cpf_digito_verificador_errado</a:t>
             </a:r>
             <a:r>
               <a:rPr lang="en-US" sz="900" dirty="0">
@@ -13244,7 +13063,7 @@
                 <a:ea typeface="Courier New" pitchFamily="34" charset="-122"/>
                 <a:cs typeface="Courier New" pitchFamily="34" charset="-120"/>
               </a:rPr>
-              <a:t>   </a:t>
+              <a:t> </a:t>
             </a:r>
             <a:r>
               <a:rPr lang="en-US" sz="900" dirty="0">
@@ -13302,90 +13121,13 @@
             <a:r>
               <a:rPr lang="en-US" sz="900" dirty="0">
                 <a:solidFill>
-                  <a:srgbClr val="CCCCCC"/>
-                </a:solidFill>
-                <a:latin typeface="Courier New" pitchFamily="34" charset="0"/>
-                <a:ea typeface="Courier New" pitchFamily="34" charset="-122"/>
-                <a:cs typeface="Courier New" pitchFamily="34" charset="-120"/>
-              </a:rPr>
-              <a:t>    </a:t>
-            </a:r>
-            <a:r>
-              <a:rPr lang="en-US" sz="900" dirty="0">
-                <a:solidFill>
                   <a:srgbClr val="569CD6"/>
                 </a:solidFill>
                 <a:latin typeface="Courier New" pitchFamily="34" charset="0"/>
                 <a:ea typeface="Courier New" pitchFamily="34" charset="-122"/>
                 <a:cs typeface="Courier New" pitchFamily="34" charset="-120"/>
               </a:rPr>
-              <a:t>METHODS</a:t>
-            </a:r>
-            <a:r>
-              <a:rPr lang="en-US" sz="900" dirty="0">
-                <a:solidFill>
-                  <a:srgbClr val="CCCCCC"/>
-                </a:solidFill>
-                <a:latin typeface="Courier New" pitchFamily="34" charset="0"/>
-                <a:ea typeface="Courier New" pitchFamily="34" charset="-122"/>
-                <a:cs typeface="Courier New" pitchFamily="34" charset="-120"/>
-              </a:rPr>
-              <a:t> </a:t>
-            </a:r>
-            <a:r>
-              <a:rPr lang="en-US" sz="900" dirty="0">
-                <a:solidFill>
-                  <a:srgbClr val="CCCCCC"/>
-                </a:solidFill>
-                <a:latin typeface="Courier New" pitchFamily="34" charset="0"/>
-                <a:ea typeface="Courier New" pitchFamily="34" charset="-122"/>
-                <a:cs typeface="Courier New" pitchFamily="34" charset="-120"/>
-              </a:rPr>
-              <a:t>divide_zero</a:t>
-            </a:r>
-            <a:r>
-              <a:rPr lang="en-US" sz="900" dirty="0">
-                <a:solidFill>
-                  <a:srgbClr val="CCCCCC"/>
-                </a:solidFill>
-                <a:latin typeface="Courier New" pitchFamily="34" charset="0"/>
-                <a:ea typeface="Courier New" pitchFamily="34" charset="-122"/>
-                <a:cs typeface="Courier New" pitchFamily="34" charset="-120"/>
-              </a:rPr>
-              <a:t> </a:t>
-            </a:r>
-            <a:r>
-              <a:rPr lang="en-US" sz="900" dirty="0">
-                <a:solidFill>
-                  <a:srgbClr val="569CD6"/>
-                </a:solidFill>
-                <a:latin typeface="Courier New" pitchFamily="34" charset="0"/>
-                <a:ea typeface="Courier New" pitchFamily="34" charset="-122"/>
-                <a:cs typeface="Courier New" pitchFamily="34" charset="-120"/>
-              </a:rPr>
-              <a:t>FOR</a:t>
-            </a:r>
-            <a:r>
-              <a:rPr lang="en-US" sz="900" dirty="0">
-                <a:solidFill>
-                  <a:srgbClr val="CCCCCC"/>
-                </a:solidFill>
-                <a:latin typeface="Courier New" pitchFamily="34" charset="0"/>
-                <a:ea typeface="Courier New" pitchFamily="34" charset="-122"/>
-                <a:cs typeface="Courier New" pitchFamily="34" charset="-120"/>
-              </a:rPr>
-              <a:t> </a:t>
-            </a:r>
-            <a:r>
-              <a:rPr lang="en-US" sz="900" dirty="0">
-                <a:solidFill>
-                  <a:srgbClr val="CCCCCC"/>
-                </a:solidFill>
-                <a:latin typeface="Courier New" pitchFamily="34" charset="0"/>
-                <a:ea typeface="Courier New" pitchFamily="34" charset="-122"/>
-                <a:cs typeface="Courier New" pitchFamily="34" charset="-120"/>
-              </a:rPr>
-              <a:t>TESTING</a:t>
+              <a:t>ENDCLASS</a:t>
             </a:r>
             <a:r>
               <a:rPr lang="en-US" sz="900" dirty="0">
@@ -13410,24 +13152,13 @@
             <a:r>
               <a:rPr lang="en-US" sz="900" dirty="0">
                 <a:solidFill>
-                  <a:srgbClr val="569CD6"/>
-                </a:solidFill>
-                <a:latin typeface="Courier New" pitchFamily="34" charset="0"/>
-                <a:ea typeface="Courier New" pitchFamily="34" charset="-122"/>
-                <a:cs typeface="Courier New" pitchFamily="34" charset="-120"/>
-              </a:rPr>
-              <a:t>ENDCLASS</a:t>
-            </a:r>
-            <a:r>
-              <a:rPr lang="en-US" sz="900" dirty="0">
-                <a:solidFill>
-                  <a:srgbClr val="CCCCCC"/>
-                </a:solidFill>
-                <a:latin typeface="Courier New" pitchFamily="34" charset="0"/>
-                <a:ea typeface="Courier New" pitchFamily="34" charset="-122"/>
-                <a:cs typeface="Courier New" pitchFamily="34" charset="-120"/>
-              </a:rPr>
-              <a:t>.</a:t>
+                  <a:srgbClr val="000000"/>
+                </a:solidFill>
+                <a:latin typeface="Courier New" pitchFamily="34" charset="0"/>
+                <a:ea typeface="Courier New" pitchFamily="34" charset="-122"/>
+                <a:cs typeface="Courier New" pitchFamily="34" charset="-120"/>
+              </a:rPr>
+              <a:t> </a:t>
             </a:r>
             <a:endParaRPr lang="en-US" sz="900" dirty="0"/>
           </a:p>
@@ -13441,13 +13172,68 @@
             <a:r>
               <a:rPr lang="en-US" sz="900" dirty="0">
                 <a:solidFill>
-                  <a:srgbClr val="000000"/>
+                  <a:srgbClr val="569CD6"/>
+                </a:solidFill>
+                <a:latin typeface="Courier New" pitchFamily="34" charset="0"/>
+                <a:ea typeface="Courier New" pitchFamily="34" charset="-122"/>
+                <a:cs typeface="Courier New" pitchFamily="34" charset="-120"/>
+              </a:rPr>
+              <a:t>CLASS</a:t>
+            </a:r>
+            <a:r>
+              <a:rPr lang="en-US" sz="900" dirty="0">
+                <a:solidFill>
+                  <a:srgbClr val="CCCCCC"/>
                 </a:solidFill>
                 <a:latin typeface="Courier New" pitchFamily="34" charset="0"/>
                 <a:ea typeface="Courier New" pitchFamily="34" charset="-122"/>
                 <a:cs typeface="Courier New" pitchFamily="34" charset="-120"/>
               </a:rPr>
               <a:t> </a:t>
+            </a:r>
+            <a:r>
+              <a:rPr lang="en-US" sz="900" dirty="0">
+                <a:solidFill>
+                  <a:srgbClr val="CCCCCC"/>
+                </a:solidFill>
+                <a:latin typeface="Courier New" pitchFamily="34" charset="0"/>
+                <a:ea typeface="Courier New" pitchFamily="34" charset="-122"/>
+                <a:cs typeface="Courier New" pitchFamily="34" charset="-120"/>
+              </a:rPr>
+              <a:t>ltcl_digitos_cpf</a:t>
+            </a:r>
+            <a:r>
+              <a:rPr lang="en-US" sz="900" dirty="0">
+                <a:solidFill>
+                  <a:srgbClr val="CCCCCC"/>
+                </a:solidFill>
+                <a:latin typeface="Courier New" pitchFamily="34" charset="0"/>
+                <a:ea typeface="Courier New" pitchFamily="34" charset="-122"/>
+                <a:cs typeface="Courier New" pitchFamily="34" charset="-120"/>
+              </a:rPr>
+              <a:t> </a:t>
+            </a:r>
+            <a:r>
+              <a:rPr lang="en-US" sz="900" dirty="0">
+                <a:solidFill>
+                  <a:srgbClr val="569CD6"/>
+                </a:solidFill>
+                <a:latin typeface="Courier New" pitchFamily="34" charset="0"/>
+                <a:ea typeface="Courier New" pitchFamily="34" charset="-122"/>
+                <a:cs typeface="Courier New" pitchFamily="34" charset="-120"/>
+              </a:rPr>
+              <a:t>IMPLEMENTATION</a:t>
+            </a:r>
+            <a:r>
+              <a:rPr lang="en-US" sz="900" dirty="0">
+                <a:solidFill>
+                  <a:srgbClr val="CCCCCC"/>
+                </a:solidFill>
+                <a:latin typeface="Courier New" pitchFamily="34" charset="0"/>
+                <a:ea typeface="Courier New" pitchFamily="34" charset="-122"/>
+                <a:cs typeface="Courier New" pitchFamily="34" charset="-120"/>
+              </a:rPr>
+              <a:t>.</a:t>
             </a:r>
             <a:endParaRPr lang="en-US" sz="900" dirty="0"/>
           </a:p>
@@ -13461,13 +13247,24 @@
             <a:r>
               <a:rPr lang="en-US" sz="900" dirty="0">
                 <a:solidFill>
+                  <a:srgbClr val="CCCCCC"/>
+                </a:solidFill>
+                <a:latin typeface="Courier New" pitchFamily="34" charset="0"/>
+                <a:ea typeface="Courier New" pitchFamily="34" charset="-122"/>
+                <a:cs typeface="Courier New" pitchFamily="34" charset="-120"/>
+              </a:rPr>
+              <a:t>  </a:t>
+            </a:r>
+            <a:r>
+              <a:rPr lang="en-US" sz="900" dirty="0">
+                <a:solidFill>
                   <a:srgbClr val="569CD6"/>
                 </a:solidFill>
                 <a:latin typeface="Courier New" pitchFamily="34" charset="0"/>
                 <a:ea typeface="Courier New" pitchFamily="34" charset="-122"/>
                 <a:cs typeface="Courier New" pitchFamily="34" charset="-120"/>
               </a:rPr>
-              <a:t>CLASS</a:t>
+              <a:t>METHOD</a:t>
             </a:r>
             <a:r>
               <a:rPr lang="en-US" sz="900" dirty="0">
@@ -13489,29 +13286,7 @@
                 <a:ea typeface="Courier New" pitchFamily="34" charset="-122"/>
                 <a:cs typeface="Courier New" pitchFamily="34" charset="-120"/>
               </a:rPr>
-              <a:t>ltcl_calc</a:t>
-            </a:r>
-            <a:r>
-              <a:rPr lang="en-US" sz="900" dirty="0">
-                <a:solidFill>
-                  <a:srgbClr val="CCCCCC"/>
-                </a:solidFill>
-                <a:latin typeface="Courier New" pitchFamily="34" charset="0"/>
-                <a:ea typeface="Courier New" pitchFamily="34" charset="-122"/>
-                <a:cs typeface="Courier New" pitchFamily="34" charset="-120"/>
-              </a:rPr>
-              <a:t> </a:t>
-            </a:r>
-            <a:r>
-              <a:rPr lang="en-US" sz="900" dirty="0">
-                <a:solidFill>
-                  <a:srgbClr val="569CD6"/>
-                </a:solidFill>
-                <a:latin typeface="Courier New" pitchFamily="34" charset="0"/>
-                <a:ea typeface="Courier New" pitchFamily="34" charset="-122"/>
-                <a:cs typeface="Courier New" pitchFamily="34" charset="-120"/>
-              </a:rPr>
-              <a:t>IMPLEMENTATION</a:t>
+              <a:t>cpf_valido_sem_mascara</a:t>
             </a:r>
             <a:r>
               <a:rPr lang="en-US" sz="900" dirty="0">
@@ -13542,18 +13317,18 @@
                 <a:ea typeface="Courier New" pitchFamily="34" charset="-122"/>
                 <a:cs typeface="Courier New" pitchFamily="34" charset="-120"/>
               </a:rPr>
-              <a:t>  </a:t>
+              <a:t>    </a:t>
             </a:r>
             <a:r>
               <a:rPr lang="en-US" sz="900" dirty="0">
                 <a:solidFill>
-                  <a:srgbClr val="569CD6"/>
-                </a:solidFill>
-                <a:latin typeface="Courier New" pitchFamily="34" charset="0"/>
-                <a:ea typeface="Courier New" pitchFamily="34" charset="-122"/>
-                <a:cs typeface="Courier New" pitchFamily="34" charset="-120"/>
-              </a:rPr>
-              <a:t>METHOD</a:t>
+                  <a:srgbClr val="4EC9B0"/>
+                </a:solidFill>
+                <a:latin typeface="Courier New" pitchFamily="34" charset="0"/>
+                <a:ea typeface="Courier New" pitchFamily="34" charset="-122"/>
+                <a:cs typeface="Courier New" pitchFamily="34" charset="-120"/>
+              </a:rPr>
+              <a:t>cl_abap_unit_assert=&gt;</a:t>
             </a:r>
             <a:r>
               <a:rPr lang="en-US" sz="900" dirty="0">
@@ -13564,7 +13339,7 @@
                 <a:ea typeface="Courier New" pitchFamily="34" charset="-122"/>
                 <a:cs typeface="Courier New" pitchFamily="34" charset="-120"/>
               </a:rPr>
-              <a:t> </a:t>
+              <a:t>assert_equals</a:t>
             </a:r>
             <a:r>
               <a:rPr lang="en-US" sz="900" dirty="0">
@@ -13575,18 +13350,7 @@
                 <a:ea typeface="Courier New" pitchFamily="34" charset="-122"/>
                 <a:cs typeface="Courier New" pitchFamily="34" charset="-120"/>
               </a:rPr>
-              <a:t>setup</a:t>
-            </a:r>
-            <a:r>
-              <a:rPr lang="en-US" sz="900" dirty="0">
-                <a:solidFill>
-                  <a:srgbClr val="CCCCCC"/>
-                </a:solidFill>
-                <a:latin typeface="Courier New" pitchFamily="34" charset="0"/>
-                <a:ea typeface="Courier New" pitchFamily="34" charset="-122"/>
-                <a:cs typeface="Courier New" pitchFamily="34" charset="-120"/>
-              </a:rPr>
-              <a:t>.</a:t>
+              <a:t>(</a:t>
             </a:r>
             <a:endParaRPr lang="en-US" sz="900" dirty="0"/>
           </a:p>
@@ -13606,7 +13370,7 @@
                 <a:ea typeface="Courier New" pitchFamily="34" charset="-122"/>
                 <a:cs typeface="Courier New" pitchFamily="34" charset="-120"/>
               </a:rPr>
-              <a:t>    </a:t>
+              <a:t>      </a:t>
             </a:r>
             <a:r>
               <a:rPr lang="en-US" sz="900" dirty="0">
@@ -13617,7 +13381,7 @@
                 <a:ea typeface="Courier New" pitchFamily="34" charset="-122"/>
                 <a:cs typeface="Courier New" pitchFamily="34" charset="-120"/>
               </a:rPr>
-              <a:t>cut</a:t>
+              <a:t>act</a:t>
             </a:r>
             <a:r>
               <a:rPr lang="en-US" sz="900" dirty="0">
@@ -13655,13 +13419,13 @@
             <a:r>
               <a:rPr lang="en-US" sz="900" dirty="0">
                 <a:solidFill>
-                  <a:srgbClr val="569CD6"/>
-                </a:solidFill>
-                <a:latin typeface="Courier New" pitchFamily="34" charset="0"/>
-                <a:ea typeface="Courier New" pitchFamily="34" charset="-122"/>
-                <a:cs typeface="Courier New" pitchFamily="34" charset="-120"/>
-              </a:rPr>
-              <a:t>NEW</a:t>
+                  <a:srgbClr val="4EC9B0"/>
+                </a:solidFill>
+                <a:latin typeface="Courier New" pitchFamily="34" charset="0"/>
+                <a:ea typeface="Courier New" pitchFamily="34" charset="-122"/>
+                <a:cs typeface="Courier New" pitchFamily="34" charset="-120"/>
+              </a:rPr>
+              <a:t>zcl_pc_util=&gt;</a:t>
             </a:r>
             <a:r>
               <a:rPr lang="en-US" sz="900" dirty="0">
@@ -13672,18 +13436,51 @@
                 <a:ea typeface="Courier New" pitchFamily="34" charset="-122"/>
                 <a:cs typeface="Courier New" pitchFamily="34" charset="-120"/>
               </a:rPr>
+              <a:t>validar_cpf</a:t>
+            </a:r>
+            <a:r>
+              <a:rPr lang="en-US" sz="900" dirty="0">
+                <a:solidFill>
+                  <a:srgbClr val="CCCCCC"/>
+                </a:solidFill>
+                <a:latin typeface="Courier New" pitchFamily="34" charset="0"/>
+                <a:ea typeface="Courier New" pitchFamily="34" charset="-122"/>
+                <a:cs typeface="Courier New" pitchFamily="34" charset="-120"/>
+              </a:rPr>
+              <a:t>(</a:t>
+            </a:r>
+            <a:r>
+              <a:rPr lang="en-US" sz="900" dirty="0">
+                <a:solidFill>
+                  <a:srgbClr val="CCCCCC"/>
+                </a:solidFill>
+                <a:latin typeface="Courier New" pitchFamily="34" charset="0"/>
+                <a:ea typeface="Courier New" pitchFamily="34" charset="-122"/>
+                <a:cs typeface="Courier New" pitchFamily="34" charset="-120"/>
+              </a:rPr>
               <a:t> </a:t>
             </a:r>
             <a:r>
               <a:rPr lang="en-US" sz="900" dirty="0">
                 <a:solidFill>
+                  <a:srgbClr val="CE9178"/>
+                </a:solidFill>
+                <a:latin typeface="Courier New" pitchFamily="34" charset="0"/>
+                <a:ea typeface="Courier New" pitchFamily="34" charset="-122"/>
+                <a:cs typeface="Courier New" pitchFamily="34" charset="-120"/>
+              </a:rPr>
+              <a:t>'52998224725'</a:t>
+            </a:r>
+            <a:r>
+              <a:rPr lang="en-US" sz="900" dirty="0">
+                <a:solidFill>
                   <a:srgbClr val="CCCCCC"/>
                 </a:solidFill>
                 <a:latin typeface="Courier New" pitchFamily="34" charset="0"/>
                 <a:ea typeface="Courier New" pitchFamily="34" charset="-122"/>
                 <a:cs typeface="Courier New" pitchFamily="34" charset="-120"/>
               </a:rPr>
-              <a:t>#</a:t>
+              <a:t> </a:t>
             </a:r>
             <a:r>
               <a:rPr lang="en-US" sz="900" dirty="0">
@@ -13694,40 +13491,7 @@
                 <a:ea typeface="Courier New" pitchFamily="34" charset="-122"/>
                 <a:cs typeface="Courier New" pitchFamily="34" charset="-120"/>
               </a:rPr>
-              <a:t>(</a:t>
-            </a:r>
-            <a:r>
-              <a:rPr lang="en-US" sz="900" dirty="0">
-                <a:solidFill>
-                  <a:srgbClr val="CCCCCC"/>
-                </a:solidFill>
-                <a:latin typeface="Courier New" pitchFamily="34" charset="0"/>
-                <a:ea typeface="Courier New" pitchFamily="34" charset="-122"/>
-                <a:cs typeface="Courier New" pitchFamily="34" charset="-120"/>
-              </a:rPr>
-              <a:t> </a:t>
-            </a:r>
-            <a:r>
-              <a:rPr lang="en-US" sz="900" dirty="0">
-                <a:solidFill>
-                  <a:srgbClr val="CCCCCC"/>
-                </a:solidFill>
-                <a:latin typeface="Courier New" pitchFamily="34" charset="0"/>
-                <a:ea typeface="Courier New" pitchFamily="34" charset="-122"/>
-                <a:cs typeface="Courier New" pitchFamily="34" charset="-120"/>
-              </a:rPr>
               <a:t>)</a:t>
-            </a:r>
-            <a:r>
-              <a:rPr lang="en-US" sz="900" dirty="0">
-                <a:solidFill>
-                  <a:srgbClr val="CCCCCC"/>
-                </a:solidFill>
-                <a:latin typeface="Courier New" pitchFamily="34" charset="0"/>
-                <a:ea typeface="Courier New" pitchFamily="34" charset="-122"/>
-                <a:cs typeface="Courier New" pitchFamily="34" charset="-120"/>
-              </a:rPr>
-              <a:t>.</a:t>
             </a:r>
             <a:endParaRPr lang="en-US" sz="900" dirty="0"/>
           </a:p>
@@ -13747,18 +13511,18 @@
                 <a:ea typeface="Courier New" pitchFamily="34" charset="-122"/>
                 <a:cs typeface="Courier New" pitchFamily="34" charset="-120"/>
               </a:rPr>
-              <a:t>  </a:t>
+              <a:t>      </a:t>
             </a:r>
             <a:r>
               <a:rPr lang="en-US" sz="900" dirty="0">
                 <a:solidFill>
-                  <a:srgbClr val="569CD6"/>
-                </a:solidFill>
-                <a:latin typeface="Courier New" pitchFamily="34" charset="0"/>
-                <a:ea typeface="Courier New" pitchFamily="34" charset="-122"/>
-                <a:cs typeface="Courier New" pitchFamily="34" charset="-120"/>
-              </a:rPr>
-              <a:t>ENDMETHOD</a:t>
+                  <a:srgbClr val="CCCCCC"/>
+                </a:solidFill>
+                <a:latin typeface="Courier New" pitchFamily="34" charset="0"/>
+                <a:ea typeface="Courier New" pitchFamily="34" charset="-122"/>
+                <a:cs typeface="Courier New" pitchFamily="34" charset="-120"/>
+              </a:rPr>
+              <a:t>exp</a:t>
             </a:r>
             <a:r>
               <a:rPr lang="en-US" sz="900" dirty="0">
@@ -13769,7 +13533,40 @@
                 <a:ea typeface="Courier New" pitchFamily="34" charset="-122"/>
                 <a:cs typeface="Courier New" pitchFamily="34" charset="-120"/>
               </a:rPr>
-              <a:t>.</a:t>
+              <a:t> </a:t>
+            </a:r>
+            <a:r>
+              <a:rPr lang="en-US" sz="900" dirty="0">
+                <a:solidFill>
+                  <a:srgbClr val="CCCCCC"/>
+                </a:solidFill>
+                <a:latin typeface="Courier New" pitchFamily="34" charset="0"/>
+                <a:ea typeface="Courier New" pitchFamily="34" charset="-122"/>
+                <a:cs typeface="Courier New" pitchFamily="34" charset="-120"/>
+              </a:rPr>
+              <a:t>=</a:t>
+            </a:r>
+            <a:r>
+              <a:rPr lang="en-US" sz="900" dirty="0">
+                <a:solidFill>
+                  <a:srgbClr val="CCCCCC"/>
+                </a:solidFill>
+                <a:latin typeface="Courier New" pitchFamily="34" charset="0"/>
+                <a:ea typeface="Courier New" pitchFamily="34" charset="-122"/>
+                <a:cs typeface="Courier New" pitchFamily="34" charset="-120"/>
+              </a:rPr>
+              <a:t> </a:t>
+            </a:r>
+            <a:r>
+              <a:rPr lang="en-US" sz="900" dirty="0">
+                <a:solidFill>
+                  <a:srgbClr val="CCCCCC"/>
+                </a:solidFill>
+                <a:latin typeface="Courier New" pitchFamily="34" charset="0"/>
+                <a:ea typeface="Courier New" pitchFamily="34" charset="-122"/>
+                <a:cs typeface="Courier New" pitchFamily="34" charset="-120"/>
+              </a:rPr>
+              <a:t>abap_true</a:t>
             </a:r>
             <a:endParaRPr lang="en-US" sz="900" dirty="0"/>
           </a:p>
@@ -13789,18 +13586,18 @@
                 <a:ea typeface="Courier New" pitchFamily="34" charset="-122"/>
                 <a:cs typeface="Courier New" pitchFamily="34" charset="-120"/>
               </a:rPr>
-              <a:t>  </a:t>
+              <a:t>      </a:t>
             </a:r>
             <a:r>
               <a:rPr lang="en-US" sz="900" dirty="0">
                 <a:solidFill>
-                  <a:srgbClr val="569CD6"/>
-                </a:solidFill>
-                <a:latin typeface="Courier New" pitchFamily="34" charset="0"/>
-                <a:ea typeface="Courier New" pitchFamily="34" charset="-122"/>
-                <a:cs typeface="Courier New" pitchFamily="34" charset="-120"/>
-              </a:rPr>
-              <a:t>METHOD</a:t>
+                  <a:srgbClr val="CCCCCC"/>
+                </a:solidFill>
+                <a:latin typeface="Courier New" pitchFamily="34" charset="0"/>
+                <a:ea typeface="Courier New" pitchFamily="34" charset="-122"/>
+                <a:cs typeface="Courier New" pitchFamily="34" charset="-120"/>
+              </a:rPr>
+              <a:t>msg</a:t>
             </a:r>
             <a:r>
               <a:rPr lang="en-US" sz="900" dirty="0">
@@ -13822,7 +13619,51 @@
                 <a:ea typeface="Courier New" pitchFamily="34" charset="-122"/>
                 <a:cs typeface="Courier New" pitchFamily="34" charset="-120"/>
               </a:rPr>
-              <a:t>divide_ok</a:t>
+              <a:t>=</a:t>
+            </a:r>
+            <a:r>
+              <a:rPr lang="en-US" sz="900" dirty="0">
+                <a:solidFill>
+                  <a:srgbClr val="CCCCCC"/>
+                </a:solidFill>
+                <a:latin typeface="Courier New" pitchFamily="34" charset="0"/>
+                <a:ea typeface="Courier New" pitchFamily="34" charset="-122"/>
+                <a:cs typeface="Courier New" pitchFamily="34" charset="-120"/>
+              </a:rPr>
+              <a:t> </a:t>
+            </a:r>
+            <a:r>
+              <a:rPr lang="en-US" sz="900" dirty="0">
+                <a:solidFill>
+                  <a:srgbClr val="CE9178"/>
+                </a:solidFill>
+                <a:latin typeface="Courier New" pitchFamily="34" charset="0"/>
+                <a:ea typeface="Courier New" pitchFamily="34" charset="-122"/>
+                <a:cs typeface="Courier New" pitchFamily="34" charset="-120"/>
+              </a:rPr>
+              <a:t>'CPF com dígitos verificadores corretos deve ser válido'</a:t>
+            </a:r>
+            <a:r>
+              <a:rPr lang="en-US" sz="900" dirty="0">
+                <a:solidFill>
+                  <a:srgbClr val="CCCCCC"/>
+                </a:solidFill>
+                <a:latin typeface="Courier New" pitchFamily="34" charset="0"/>
+                <a:ea typeface="Courier New" pitchFamily="34" charset="-122"/>
+                <a:cs typeface="Courier New" pitchFamily="34" charset="-120"/>
+              </a:rPr>
+              <a:t> </a:t>
+            </a:r>
+            <a:r>
+              <a:rPr lang="en-US" sz="900" dirty="0">
+                <a:solidFill>
+                  <a:srgbClr val="CCCCCC"/>
+                </a:solidFill>
+                <a:latin typeface="Courier New" pitchFamily="34" charset="0"/>
+                <a:ea typeface="Courier New" pitchFamily="34" charset="-122"/>
+                <a:cs typeface="Courier New" pitchFamily="34" charset="-120"/>
+              </a:rPr>
+              <a:t>)</a:t>
             </a:r>
             <a:r>
               <a:rPr lang="en-US" sz="900" dirty="0">
@@ -13853,18 +13694,18 @@
                 <a:ea typeface="Courier New" pitchFamily="34" charset="-122"/>
                 <a:cs typeface="Courier New" pitchFamily="34" charset="-120"/>
               </a:rPr>
-              <a:t>    </a:t>
+              <a:t>  </a:t>
             </a:r>
             <a:r>
               <a:rPr lang="en-US" sz="900" dirty="0">
                 <a:solidFill>
-                  <a:srgbClr val="4EC9B0"/>
-                </a:solidFill>
-                <a:latin typeface="Courier New" pitchFamily="34" charset="0"/>
-                <a:ea typeface="Courier New" pitchFamily="34" charset="-122"/>
-                <a:cs typeface="Courier New" pitchFamily="34" charset="-120"/>
-              </a:rPr>
-              <a:t>cl_abap_unit_assert=&gt;</a:t>
+                  <a:srgbClr val="569CD6"/>
+                </a:solidFill>
+                <a:latin typeface="Courier New" pitchFamily="34" charset="0"/>
+                <a:ea typeface="Courier New" pitchFamily="34" charset="-122"/>
+                <a:cs typeface="Courier New" pitchFamily="34" charset="-120"/>
+              </a:rPr>
+              <a:t>ENDMETHOD</a:t>
             </a:r>
             <a:r>
               <a:rPr lang="en-US" sz="900" dirty="0">
@@ -13875,271 +13716,7 @@
                 <a:ea typeface="Courier New" pitchFamily="34" charset="-122"/>
                 <a:cs typeface="Courier New" pitchFamily="34" charset="-120"/>
               </a:rPr>
-              <a:t>assert_equals</a:t>
-            </a:r>
-            <a:r>
-              <a:rPr lang="en-US" sz="900" dirty="0">
-                <a:solidFill>
-                  <a:srgbClr val="CCCCCC"/>
-                </a:solidFill>
-                <a:latin typeface="Courier New" pitchFamily="34" charset="0"/>
-                <a:ea typeface="Courier New" pitchFamily="34" charset="-122"/>
-                <a:cs typeface="Courier New" pitchFamily="34" charset="-120"/>
-              </a:rPr>
-              <a:t>(</a:t>
-            </a:r>
-            <a:r>
-              <a:rPr lang="en-US" sz="900" dirty="0">
-                <a:solidFill>
-                  <a:srgbClr val="CCCCCC"/>
-                </a:solidFill>
-                <a:latin typeface="Courier New" pitchFamily="34" charset="0"/>
-                <a:ea typeface="Courier New" pitchFamily="34" charset="-122"/>
-                <a:cs typeface="Courier New" pitchFamily="34" charset="-120"/>
-              </a:rPr>
-              <a:t> </a:t>
-            </a:r>
-            <a:r>
-              <a:rPr lang="en-US" sz="900" dirty="0">
-                <a:solidFill>
-                  <a:srgbClr val="CCCCCC"/>
-                </a:solidFill>
-                <a:latin typeface="Courier New" pitchFamily="34" charset="0"/>
-                <a:ea typeface="Courier New" pitchFamily="34" charset="-122"/>
-                <a:cs typeface="Courier New" pitchFamily="34" charset="-120"/>
-              </a:rPr>
-              <a:t>act</a:t>
-            </a:r>
-            <a:r>
-              <a:rPr lang="en-US" sz="900" dirty="0">
-                <a:solidFill>
-                  <a:srgbClr val="CCCCCC"/>
-                </a:solidFill>
-                <a:latin typeface="Courier New" pitchFamily="34" charset="0"/>
-                <a:ea typeface="Courier New" pitchFamily="34" charset="-122"/>
-                <a:cs typeface="Courier New" pitchFamily="34" charset="-120"/>
-              </a:rPr>
-              <a:t> </a:t>
-            </a:r>
-            <a:r>
-              <a:rPr lang="en-US" sz="900" dirty="0">
-                <a:solidFill>
-                  <a:srgbClr val="CCCCCC"/>
-                </a:solidFill>
-                <a:latin typeface="Courier New" pitchFamily="34" charset="0"/>
-                <a:ea typeface="Courier New" pitchFamily="34" charset="-122"/>
-                <a:cs typeface="Courier New" pitchFamily="34" charset="-120"/>
-              </a:rPr>
-              <a:t>=</a:t>
-            </a:r>
-            <a:r>
-              <a:rPr lang="en-US" sz="900" dirty="0">
-                <a:solidFill>
-                  <a:srgbClr val="CCCCCC"/>
-                </a:solidFill>
-                <a:latin typeface="Courier New" pitchFamily="34" charset="0"/>
-                <a:ea typeface="Courier New" pitchFamily="34" charset="-122"/>
-                <a:cs typeface="Courier New" pitchFamily="34" charset="-120"/>
-              </a:rPr>
-              <a:t> </a:t>
-            </a:r>
-            <a:r>
-              <a:rPr lang="en-US" sz="900" dirty="0">
-                <a:solidFill>
-                  <a:srgbClr val="CCCCCC"/>
-                </a:solidFill>
-                <a:latin typeface="Courier New" pitchFamily="34" charset="0"/>
-                <a:ea typeface="Courier New" pitchFamily="34" charset="-122"/>
-                <a:cs typeface="Courier New" pitchFamily="34" charset="-120"/>
-              </a:rPr>
-              <a:t>cut-</a:t>
-            </a:r>
-            <a:r>
-              <a:rPr lang="en-US" sz="900" dirty="0">
-                <a:solidFill>
-                  <a:srgbClr val="CCCCCC"/>
-                </a:solidFill>
-                <a:latin typeface="Courier New" pitchFamily="34" charset="0"/>
-                <a:ea typeface="Courier New" pitchFamily="34" charset="-122"/>
-                <a:cs typeface="Courier New" pitchFamily="34" charset="-120"/>
-              </a:rPr>
-              <a:t>&gt;</a:t>
-            </a:r>
-            <a:r>
-              <a:rPr lang="en-US" sz="900" dirty="0">
-                <a:solidFill>
-                  <a:srgbClr val="CCCCCC"/>
-                </a:solidFill>
-                <a:latin typeface="Courier New" pitchFamily="34" charset="0"/>
-                <a:ea typeface="Courier New" pitchFamily="34" charset="-122"/>
-                <a:cs typeface="Courier New" pitchFamily="34" charset="-120"/>
-              </a:rPr>
-              <a:t>divide</a:t>
-            </a:r>
-            <a:r>
-              <a:rPr lang="en-US" sz="900" dirty="0">
-                <a:solidFill>
-                  <a:srgbClr val="CCCCCC"/>
-                </a:solidFill>
-                <a:latin typeface="Courier New" pitchFamily="34" charset="0"/>
-                <a:ea typeface="Courier New" pitchFamily="34" charset="-122"/>
-                <a:cs typeface="Courier New" pitchFamily="34" charset="-120"/>
-              </a:rPr>
-              <a:t>(</a:t>
-            </a:r>
-            <a:r>
-              <a:rPr lang="en-US" sz="900" dirty="0">
-                <a:solidFill>
-                  <a:srgbClr val="CCCCCC"/>
-                </a:solidFill>
-                <a:latin typeface="Courier New" pitchFamily="34" charset="0"/>
-                <a:ea typeface="Courier New" pitchFamily="34" charset="-122"/>
-                <a:cs typeface="Courier New" pitchFamily="34" charset="-120"/>
-              </a:rPr>
-              <a:t> </a:t>
-            </a:r>
-            <a:r>
-              <a:rPr lang="en-US" sz="900" dirty="0">
-                <a:solidFill>
-                  <a:srgbClr val="CCCCCC"/>
-                </a:solidFill>
-                <a:latin typeface="Courier New" pitchFamily="34" charset="0"/>
-                <a:ea typeface="Courier New" pitchFamily="34" charset="-122"/>
-                <a:cs typeface="Courier New" pitchFamily="34" charset="-120"/>
-              </a:rPr>
-              <a:t>a</a:t>
-            </a:r>
-            <a:r>
-              <a:rPr lang="en-US" sz="900" dirty="0">
-                <a:solidFill>
-                  <a:srgbClr val="CCCCCC"/>
-                </a:solidFill>
-                <a:latin typeface="Courier New" pitchFamily="34" charset="0"/>
-                <a:ea typeface="Courier New" pitchFamily="34" charset="-122"/>
-                <a:cs typeface="Courier New" pitchFamily="34" charset="-120"/>
-              </a:rPr>
-              <a:t> </a:t>
-            </a:r>
-            <a:r>
-              <a:rPr lang="en-US" sz="900" dirty="0">
-                <a:solidFill>
-                  <a:srgbClr val="CCCCCC"/>
-                </a:solidFill>
-                <a:latin typeface="Courier New" pitchFamily="34" charset="0"/>
-                <a:ea typeface="Courier New" pitchFamily="34" charset="-122"/>
-                <a:cs typeface="Courier New" pitchFamily="34" charset="-120"/>
-              </a:rPr>
-              <a:t>=</a:t>
-            </a:r>
-            <a:r>
-              <a:rPr lang="en-US" sz="900" dirty="0">
-                <a:solidFill>
-                  <a:srgbClr val="CCCCCC"/>
-                </a:solidFill>
-                <a:latin typeface="Courier New" pitchFamily="34" charset="0"/>
-                <a:ea typeface="Courier New" pitchFamily="34" charset="-122"/>
-                <a:cs typeface="Courier New" pitchFamily="34" charset="-120"/>
-              </a:rPr>
-              <a:t> </a:t>
-            </a:r>
-            <a:r>
-              <a:rPr lang="en-US" sz="900" dirty="0">
-                <a:solidFill>
-                  <a:srgbClr val="B5CEA8"/>
-                </a:solidFill>
-                <a:latin typeface="Courier New" pitchFamily="34" charset="0"/>
-                <a:ea typeface="Courier New" pitchFamily="34" charset="-122"/>
-                <a:cs typeface="Courier New" pitchFamily="34" charset="-120"/>
-              </a:rPr>
-              <a:t>10</a:t>
-            </a:r>
-            <a:r>
-              <a:rPr lang="en-US" sz="900" dirty="0">
-                <a:solidFill>
-                  <a:srgbClr val="CCCCCC"/>
-                </a:solidFill>
-                <a:latin typeface="Courier New" pitchFamily="34" charset="0"/>
-                <a:ea typeface="Courier New" pitchFamily="34" charset="-122"/>
-                <a:cs typeface="Courier New" pitchFamily="34" charset="-120"/>
-              </a:rPr>
-              <a:t> </a:t>
-            </a:r>
-            <a:r>
-              <a:rPr lang="en-US" sz="900" dirty="0">
-                <a:solidFill>
-                  <a:srgbClr val="CCCCCC"/>
-                </a:solidFill>
-                <a:latin typeface="Courier New" pitchFamily="34" charset="0"/>
-                <a:ea typeface="Courier New" pitchFamily="34" charset="-122"/>
-                <a:cs typeface="Courier New" pitchFamily="34" charset="-120"/>
-              </a:rPr>
-              <a:t>b</a:t>
-            </a:r>
-            <a:r>
-              <a:rPr lang="en-US" sz="900" dirty="0">
-                <a:solidFill>
-                  <a:srgbClr val="CCCCCC"/>
-                </a:solidFill>
-                <a:latin typeface="Courier New" pitchFamily="34" charset="0"/>
-                <a:ea typeface="Courier New" pitchFamily="34" charset="-122"/>
-                <a:cs typeface="Courier New" pitchFamily="34" charset="-120"/>
-              </a:rPr>
-              <a:t> </a:t>
-            </a:r>
-            <a:r>
-              <a:rPr lang="en-US" sz="900" dirty="0">
-                <a:solidFill>
-                  <a:srgbClr val="CCCCCC"/>
-                </a:solidFill>
-                <a:latin typeface="Courier New" pitchFamily="34" charset="0"/>
-                <a:ea typeface="Courier New" pitchFamily="34" charset="-122"/>
-                <a:cs typeface="Courier New" pitchFamily="34" charset="-120"/>
-              </a:rPr>
-              <a:t>=</a:t>
-            </a:r>
-            <a:r>
-              <a:rPr lang="en-US" sz="900" dirty="0">
-                <a:solidFill>
-                  <a:srgbClr val="CCCCCC"/>
-                </a:solidFill>
-                <a:latin typeface="Courier New" pitchFamily="34" charset="0"/>
-                <a:ea typeface="Courier New" pitchFamily="34" charset="-122"/>
-                <a:cs typeface="Courier New" pitchFamily="34" charset="-120"/>
-              </a:rPr>
-              <a:t> </a:t>
-            </a:r>
-            <a:r>
-              <a:rPr lang="en-US" sz="900" dirty="0">
-                <a:solidFill>
-                  <a:srgbClr val="B5CEA8"/>
-                </a:solidFill>
-                <a:latin typeface="Courier New" pitchFamily="34" charset="0"/>
-                <a:ea typeface="Courier New" pitchFamily="34" charset="-122"/>
-                <a:cs typeface="Courier New" pitchFamily="34" charset="-120"/>
-              </a:rPr>
-              <a:t>2</a:t>
-            </a:r>
-            <a:r>
-              <a:rPr lang="en-US" sz="900" dirty="0">
-                <a:solidFill>
-                  <a:srgbClr val="CCCCCC"/>
-                </a:solidFill>
-                <a:latin typeface="Courier New" pitchFamily="34" charset="0"/>
-                <a:ea typeface="Courier New" pitchFamily="34" charset="-122"/>
-                <a:cs typeface="Courier New" pitchFamily="34" charset="-120"/>
-              </a:rPr>
-              <a:t> </a:t>
-            </a:r>
-            <a:r>
-              <a:rPr lang="en-US" sz="900" dirty="0">
-                <a:solidFill>
-                  <a:srgbClr val="CCCCCC"/>
-                </a:solidFill>
-                <a:latin typeface="Courier New" pitchFamily="34" charset="0"/>
-                <a:ea typeface="Courier New" pitchFamily="34" charset="-122"/>
-                <a:cs typeface="Courier New" pitchFamily="34" charset="-120"/>
-              </a:rPr>
-              <a:t>)</a:t>
+              <a:t>.</a:t>
             </a:r>
             <a:endParaRPr lang="en-US" sz="900" dirty="0"/>
           </a:p>
@@ -14159,18 +13736,29 @@
                 <a:ea typeface="Courier New" pitchFamily="34" charset="-122"/>
                 <a:cs typeface="Courier New" pitchFamily="34" charset="-120"/>
               </a:rPr>
-              <a:t>                                        </a:t>
+              <a:t>  </a:t>
             </a:r>
             <a:r>
               <a:rPr lang="en-US" sz="900" dirty="0">
                 <a:solidFill>
+                  <a:srgbClr val="569CD6"/>
+                </a:solidFill>
+                <a:latin typeface="Courier New" pitchFamily="34" charset="0"/>
+                <a:ea typeface="Courier New" pitchFamily="34" charset="-122"/>
+                <a:cs typeface="Courier New" pitchFamily="34" charset="-120"/>
+              </a:rPr>
+              <a:t>METHOD</a:t>
+            </a:r>
+            <a:r>
+              <a:rPr lang="en-US" sz="900" dirty="0">
+                <a:solidFill>
                   <a:srgbClr val="CCCCCC"/>
                 </a:solidFill>
                 <a:latin typeface="Courier New" pitchFamily="34" charset="0"/>
                 <a:ea typeface="Courier New" pitchFamily="34" charset="-122"/>
                 <a:cs typeface="Courier New" pitchFamily="34" charset="-120"/>
               </a:rPr>
-              <a:t>exp</a:t>
+              <a:t> </a:t>
             </a:r>
             <a:r>
               <a:rPr lang="en-US" sz="900" dirty="0">
@@ -14181,62 +13769,7 @@
                 <a:ea typeface="Courier New" pitchFamily="34" charset="-122"/>
                 <a:cs typeface="Courier New" pitchFamily="34" charset="-120"/>
               </a:rPr>
-              <a:t> </a:t>
-            </a:r>
-            <a:r>
-              <a:rPr lang="en-US" sz="900" dirty="0">
-                <a:solidFill>
-                  <a:srgbClr val="CCCCCC"/>
-                </a:solidFill>
-                <a:latin typeface="Courier New" pitchFamily="34" charset="0"/>
-                <a:ea typeface="Courier New" pitchFamily="34" charset="-122"/>
-                <a:cs typeface="Courier New" pitchFamily="34" charset="-120"/>
-              </a:rPr>
-              <a:t>=</a:t>
-            </a:r>
-            <a:r>
-              <a:rPr lang="en-US" sz="900" dirty="0">
-                <a:solidFill>
-                  <a:srgbClr val="CCCCCC"/>
-                </a:solidFill>
-                <a:latin typeface="Courier New" pitchFamily="34" charset="0"/>
-                <a:ea typeface="Courier New" pitchFamily="34" charset="-122"/>
-                <a:cs typeface="Courier New" pitchFamily="34" charset="-120"/>
-              </a:rPr>
-              <a:t> </a:t>
-            </a:r>
-            <a:r>
-              <a:rPr lang="en-US" sz="900" dirty="0">
-                <a:solidFill>
-                  <a:srgbClr val="B5CEA8"/>
-                </a:solidFill>
-                <a:latin typeface="Courier New" pitchFamily="34" charset="0"/>
-                <a:ea typeface="Courier New" pitchFamily="34" charset="-122"/>
-                <a:cs typeface="Courier New" pitchFamily="34" charset="-120"/>
-              </a:rPr>
-              <a:t>5</a:t>
-            </a:r>
-            <a:r>
-              <a:rPr lang="en-US" sz="900" dirty="0">
-                <a:solidFill>
-                  <a:srgbClr val="CCCCCC"/>
-                </a:solidFill>
-                <a:latin typeface="Courier New" pitchFamily="34" charset="0"/>
-                <a:ea typeface="Courier New" pitchFamily="34" charset="-122"/>
-                <a:cs typeface="Courier New" pitchFamily="34" charset="-120"/>
-              </a:rPr>
-              <a:t> </a:t>
-            </a:r>
-            <a:r>
-              <a:rPr lang="en-US" sz="900" dirty="0">
-                <a:solidFill>
-                  <a:srgbClr val="CCCCCC"/>
-                </a:solidFill>
-                <a:latin typeface="Courier New" pitchFamily="34" charset="0"/>
-                <a:ea typeface="Courier New" pitchFamily="34" charset="-122"/>
-                <a:cs typeface="Courier New" pitchFamily="34" charset="-120"/>
-              </a:rPr>
-              <a:t>)</a:t>
+              <a:t>cpf_digito_verificador_errado</a:t>
             </a:r>
             <a:r>
               <a:rPr lang="en-US" sz="900" dirty="0">
@@ -14267,18 +13800,18 @@
                 <a:ea typeface="Courier New" pitchFamily="34" charset="-122"/>
                 <a:cs typeface="Courier New" pitchFamily="34" charset="-120"/>
               </a:rPr>
-              <a:t>  </a:t>
+              <a:t>    </a:t>
             </a:r>
             <a:r>
               <a:rPr lang="en-US" sz="900" dirty="0">
                 <a:solidFill>
-                  <a:srgbClr val="569CD6"/>
-                </a:solidFill>
-                <a:latin typeface="Courier New" pitchFamily="34" charset="0"/>
-                <a:ea typeface="Courier New" pitchFamily="34" charset="-122"/>
-                <a:cs typeface="Courier New" pitchFamily="34" charset="-120"/>
-              </a:rPr>
-              <a:t>ENDMETHOD</a:t>
+                  <a:srgbClr val="4EC9B0"/>
+                </a:solidFill>
+                <a:latin typeface="Courier New" pitchFamily="34" charset="0"/>
+                <a:ea typeface="Courier New" pitchFamily="34" charset="-122"/>
+                <a:cs typeface="Courier New" pitchFamily="34" charset="-120"/>
+              </a:rPr>
+              <a:t>cl_abap_unit_assert=&gt;</a:t>
             </a:r>
             <a:r>
               <a:rPr lang="en-US" sz="900" dirty="0">
@@ -14289,7 +13822,18 @@
                 <a:ea typeface="Courier New" pitchFamily="34" charset="-122"/>
                 <a:cs typeface="Courier New" pitchFamily="34" charset="-120"/>
               </a:rPr>
-              <a:t>.</a:t>
+              <a:t>assert_equals</a:t>
+            </a:r>
+            <a:r>
+              <a:rPr lang="en-US" sz="900" dirty="0">
+                <a:solidFill>
+                  <a:srgbClr val="CCCCCC"/>
+                </a:solidFill>
+                <a:latin typeface="Courier New" pitchFamily="34" charset="0"/>
+                <a:ea typeface="Courier New" pitchFamily="34" charset="-122"/>
+                <a:cs typeface="Courier New" pitchFamily="34" charset="-120"/>
+              </a:rPr>
+              <a:t>(</a:t>
             </a:r>
             <a:endParaRPr lang="en-US" sz="900" dirty="0"/>
           </a:p>
@@ -14309,18 +13853,18 @@
                 <a:ea typeface="Courier New" pitchFamily="34" charset="-122"/>
                 <a:cs typeface="Courier New" pitchFamily="34" charset="-120"/>
               </a:rPr>
-              <a:t>  </a:t>
+              <a:t>      </a:t>
             </a:r>
             <a:r>
               <a:rPr lang="en-US" sz="900" dirty="0">
                 <a:solidFill>
-                  <a:srgbClr val="569CD6"/>
-                </a:solidFill>
-                <a:latin typeface="Courier New" pitchFamily="34" charset="0"/>
-                <a:ea typeface="Courier New" pitchFamily="34" charset="-122"/>
-                <a:cs typeface="Courier New" pitchFamily="34" charset="-120"/>
-              </a:rPr>
-              <a:t>METHOD</a:t>
+                  <a:srgbClr val="CCCCCC"/>
+                </a:solidFill>
+                <a:latin typeface="Courier New" pitchFamily="34" charset="0"/>
+                <a:ea typeface="Courier New" pitchFamily="34" charset="-122"/>
+                <a:cs typeface="Courier New" pitchFamily="34" charset="-120"/>
+              </a:rPr>
+              <a:t>act</a:t>
             </a:r>
             <a:r>
               <a:rPr lang="en-US" sz="900" dirty="0">
@@ -14342,7 +13886,7 @@
                 <a:ea typeface="Courier New" pitchFamily="34" charset="-122"/>
                 <a:cs typeface="Courier New" pitchFamily="34" charset="-120"/>
               </a:rPr>
-              <a:t>divide_zero</a:t>
+              <a:t>=</a:t>
             </a:r>
             <a:r>
               <a:rPr lang="en-US" sz="900" dirty="0">
@@ -14353,7 +13897,84 @@
                 <a:ea typeface="Courier New" pitchFamily="34" charset="-122"/>
                 <a:cs typeface="Courier New" pitchFamily="34" charset="-120"/>
               </a:rPr>
-              <a:t>.</a:t>
+              <a:t> </a:t>
+            </a:r>
+            <a:r>
+              <a:rPr lang="en-US" sz="900" dirty="0">
+                <a:solidFill>
+                  <a:srgbClr val="4EC9B0"/>
+                </a:solidFill>
+                <a:latin typeface="Courier New" pitchFamily="34" charset="0"/>
+                <a:ea typeface="Courier New" pitchFamily="34" charset="-122"/>
+                <a:cs typeface="Courier New" pitchFamily="34" charset="-120"/>
+              </a:rPr>
+              <a:t>zcl_pc_util=&gt;</a:t>
+            </a:r>
+            <a:r>
+              <a:rPr lang="en-US" sz="900" dirty="0">
+                <a:solidFill>
+                  <a:srgbClr val="CCCCCC"/>
+                </a:solidFill>
+                <a:latin typeface="Courier New" pitchFamily="34" charset="0"/>
+                <a:ea typeface="Courier New" pitchFamily="34" charset="-122"/>
+                <a:cs typeface="Courier New" pitchFamily="34" charset="-120"/>
+              </a:rPr>
+              <a:t>validar_cpf</a:t>
+            </a:r>
+            <a:r>
+              <a:rPr lang="en-US" sz="900" dirty="0">
+                <a:solidFill>
+                  <a:srgbClr val="CCCCCC"/>
+                </a:solidFill>
+                <a:latin typeface="Courier New" pitchFamily="34" charset="0"/>
+                <a:ea typeface="Courier New" pitchFamily="34" charset="-122"/>
+                <a:cs typeface="Courier New" pitchFamily="34" charset="-120"/>
+              </a:rPr>
+              <a:t>(</a:t>
+            </a:r>
+            <a:r>
+              <a:rPr lang="en-US" sz="900" dirty="0">
+                <a:solidFill>
+                  <a:srgbClr val="CCCCCC"/>
+                </a:solidFill>
+                <a:latin typeface="Courier New" pitchFamily="34" charset="0"/>
+                <a:ea typeface="Courier New" pitchFamily="34" charset="-122"/>
+                <a:cs typeface="Courier New" pitchFamily="34" charset="-120"/>
+              </a:rPr>
+              <a:t> </a:t>
+            </a:r>
+            <a:r>
+              <a:rPr lang="en-US" sz="900" dirty="0">
+                <a:solidFill>
+                  <a:srgbClr val="CE9178"/>
+                </a:solidFill>
+                <a:latin typeface="Courier New" pitchFamily="34" charset="0"/>
+                <a:ea typeface="Courier New" pitchFamily="34" charset="-122"/>
+                <a:cs typeface="Courier New" pitchFamily="34" charset="-120"/>
+              </a:rPr>
+              <a:t>'52998224726'</a:t>
+            </a:r>
+            <a:r>
+              <a:rPr lang="en-US" sz="900" dirty="0">
+                <a:solidFill>
+                  <a:srgbClr val="CCCCCC"/>
+                </a:solidFill>
+                <a:latin typeface="Courier New" pitchFamily="34" charset="0"/>
+                <a:ea typeface="Courier New" pitchFamily="34" charset="-122"/>
+                <a:cs typeface="Courier New" pitchFamily="34" charset="-120"/>
+              </a:rPr>
+              <a:t> </a:t>
+            </a:r>
+            <a:r>
+              <a:rPr lang="en-US" sz="900" dirty="0">
+                <a:solidFill>
+                  <a:srgbClr val="CCCCCC"/>
+                </a:solidFill>
+                <a:latin typeface="Courier New" pitchFamily="34" charset="0"/>
+                <a:ea typeface="Courier New" pitchFamily="34" charset="-122"/>
+                <a:cs typeface="Courier New" pitchFamily="34" charset="-120"/>
+              </a:rPr>
+              <a:t>)</a:t>
             </a:r>
             <a:endParaRPr lang="en-US" sz="900" dirty="0"/>
           </a:p>
@@ -14373,18 +13994,18 @@
                 <a:ea typeface="Courier New" pitchFamily="34" charset="-122"/>
                 <a:cs typeface="Courier New" pitchFamily="34" charset="-120"/>
               </a:rPr>
-              <a:t>    </a:t>
+              <a:t>      </a:t>
             </a:r>
             <a:r>
               <a:rPr lang="en-US" sz="900" dirty="0">
                 <a:solidFill>
-                  <a:srgbClr val="569CD6"/>
-                </a:solidFill>
-                <a:latin typeface="Courier New" pitchFamily="34" charset="0"/>
-                <a:ea typeface="Courier New" pitchFamily="34" charset="-122"/>
-                <a:cs typeface="Courier New" pitchFamily="34" charset="-120"/>
-              </a:rPr>
-              <a:t>TRY</a:t>
+                  <a:srgbClr val="CCCCCC"/>
+                </a:solidFill>
+                <a:latin typeface="Courier New" pitchFamily="34" charset="0"/>
+                <a:ea typeface="Courier New" pitchFamily="34" charset="-122"/>
+                <a:cs typeface="Courier New" pitchFamily="34" charset="-120"/>
+              </a:rPr>
+              <a:t>exp</a:t>
             </a:r>
             <a:r>
               <a:rPr lang="en-US" sz="900" dirty="0">
@@ -14395,7 +14016,40 @@
                 <a:ea typeface="Courier New" pitchFamily="34" charset="-122"/>
                 <a:cs typeface="Courier New" pitchFamily="34" charset="-120"/>
               </a:rPr>
-              <a:t>.</a:t>
+              <a:t> </a:t>
+            </a:r>
+            <a:r>
+              <a:rPr lang="en-US" sz="900" dirty="0">
+                <a:solidFill>
+                  <a:srgbClr val="CCCCCC"/>
+                </a:solidFill>
+                <a:latin typeface="Courier New" pitchFamily="34" charset="0"/>
+                <a:ea typeface="Courier New" pitchFamily="34" charset="-122"/>
+                <a:cs typeface="Courier New" pitchFamily="34" charset="-120"/>
+              </a:rPr>
+              <a:t>=</a:t>
+            </a:r>
+            <a:r>
+              <a:rPr lang="en-US" sz="900" dirty="0">
+                <a:solidFill>
+                  <a:srgbClr val="CCCCCC"/>
+                </a:solidFill>
+                <a:latin typeface="Courier New" pitchFamily="34" charset="0"/>
+                <a:ea typeface="Courier New" pitchFamily="34" charset="-122"/>
+                <a:cs typeface="Courier New" pitchFamily="34" charset="-120"/>
+              </a:rPr>
+              <a:t> </a:t>
+            </a:r>
+            <a:r>
+              <a:rPr lang="en-US" sz="900" dirty="0">
+                <a:solidFill>
+                  <a:srgbClr val="CCCCCC"/>
+                </a:solidFill>
+                <a:latin typeface="Courier New" pitchFamily="34" charset="0"/>
+                <a:ea typeface="Courier New" pitchFamily="34" charset="-122"/>
+                <a:cs typeface="Courier New" pitchFamily="34" charset="-120"/>
+              </a:rPr>
+              <a:t>abap_false</a:t>
             </a:r>
             <a:endParaRPr lang="en-US" sz="900" dirty="0"/>
           </a:p>
@@ -14415,7 +14069,7 @@
                 <a:ea typeface="Courier New" pitchFamily="34" charset="-122"/>
                 <a:cs typeface="Courier New" pitchFamily="34" charset="-120"/>
               </a:rPr>
-              <a:t>        </a:t>
+              <a:t>      </a:t>
             </a:r>
             <a:r>
               <a:rPr lang="en-US" sz="900" dirty="0">
@@ -14426,7 +14080,7 @@
                 <a:ea typeface="Courier New" pitchFamily="34" charset="-122"/>
                 <a:cs typeface="Courier New" pitchFamily="34" charset="-120"/>
               </a:rPr>
-              <a:t>cut-</a:t>
+              <a:t>msg</a:t>
             </a:r>
             <a:r>
               <a:rPr lang="en-US" sz="900" dirty="0">
@@ -14437,7 +14091,7 @@
                 <a:ea typeface="Courier New" pitchFamily="34" charset="-122"/>
                 <a:cs typeface="Courier New" pitchFamily="34" charset="-120"/>
               </a:rPr>
-              <a:t>&gt;</a:t>
+              <a:t> </a:t>
             </a:r>
             <a:r>
               <a:rPr lang="en-US" sz="900" dirty="0">
@@ -14448,7 +14102,7 @@
                 <a:ea typeface="Courier New" pitchFamily="34" charset="-122"/>
                 <a:cs typeface="Courier New" pitchFamily="34" charset="-120"/>
               </a:rPr>
-              <a:t>divide</a:t>
+              <a:t>=</a:t>
             </a:r>
             <a:r>
               <a:rPr lang="en-US" sz="900" dirty="0">
@@ -14459,11 +14113,22 @@
                 <a:ea typeface="Courier New" pitchFamily="34" charset="-122"/>
                 <a:cs typeface="Courier New" pitchFamily="34" charset="-120"/>
               </a:rPr>
-              <a:t>(</a:t>
+              <a:t> </a:t>
             </a:r>
             <a:r>
               <a:rPr lang="en-US" sz="900" dirty="0">
                 <a:solidFill>
+                  <a:srgbClr val="CE9178"/>
+                </a:solidFill>
+                <a:latin typeface="Courier New" pitchFamily="34" charset="0"/>
+                <a:ea typeface="Courier New" pitchFamily="34" charset="-122"/>
+                <a:cs typeface="Courier New" pitchFamily="34" charset="-120"/>
+              </a:rPr>
+              <a:t>'Último dígito alterado deve invalidar o CPF'</a:t>
+            </a:r>
+            <a:r>
+              <a:rPr lang="en-US" sz="900" dirty="0">
+                <a:solidFill>
                   <a:srgbClr val="CCCCCC"/>
                 </a:solidFill>
                 <a:latin typeface="Courier New" pitchFamily="34" charset="0"/>
@@ -14481,353 +14146,7 @@
                 <a:ea typeface="Courier New" pitchFamily="34" charset="-122"/>
                 <a:cs typeface="Courier New" pitchFamily="34" charset="-120"/>
               </a:rPr>
-              <a:t>a</a:t>
-            </a:r>
-            <a:r>
-              <a:rPr lang="en-US" sz="900" dirty="0">
-                <a:solidFill>
-                  <a:srgbClr val="CCCCCC"/>
-                </a:solidFill>
-                <a:latin typeface="Courier New" pitchFamily="34" charset="0"/>
-                <a:ea typeface="Courier New" pitchFamily="34" charset="-122"/>
-                <a:cs typeface="Courier New" pitchFamily="34" charset="-120"/>
-              </a:rPr>
-              <a:t> </a:t>
-            </a:r>
-            <a:r>
-              <a:rPr lang="en-US" sz="900" dirty="0">
-                <a:solidFill>
-                  <a:srgbClr val="CCCCCC"/>
-                </a:solidFill>
-                <a:latin typeface="Courier New" pitchFamily="34" charset="0"/>
-                <a:ea typeface="Courier New" pitchFamily="34" charset="-122"/>
-                <a:cs typeface="Courier New" pitchFamily="34" charset="-120"/>
-              </a:rPr>
-              <a:t>=</a:t>
-            </a:r>
-            <a:r>
-              <a:rPr lang="en-US" sz="900" dirty="0">
-                <a:solidFill>
-                  <a:srgbClr val="CCCCCC"/>
-                </a:solidFill>
-                <a:latin typeface="Courier New" pitchFamily="34" charset="0"/>
-                <a:ea typeface="Courier New" pitchFamily="34" charset="-122"/>
-                <a:cs typeface="Courier New" pitchFamily="34" charset="-120"/>
-              </a:rPr>
-              <a:t> </a:t>
-            </a:r>
-            <a:r>
-              <a:rPr lang="en-US" sz="900" dirty="0">
-                <a:solidFill>
-                  <a:srgbClr val="B5CEA8"/>
-                </a:solidFill>
-                <a:latin typeface="Courier New" pitchFamily="34" charset="0"/>
-                <a:ea typeface="Courier New" pitchFamily="34" charset="-122"/>
-                <a:cs typeface="Courier New" pitchFamily="34" charset="-120"/>
-              </a:rPr>
-              <a:t>1</a:t>
-            </a:r>
-            <a:r>
-              <a:rPr lang="en-US" sz="900" dirty="0">
-                <a:solidFill>
-                  <a:srgbClr val="CCCCCC"/>
-                </a:solidFill>
-                <a:latin typeface="Courier New" pitchFamily="34" charset="0"/>
-                <a:ea typeface="Courier New" pitchFamily="34" charset="-122"/>
-                <a:cs typeface="Courier New" pitchFamily="34" charset="-120"/>
-              </a:rPr>
-              <a:t> </a:t>
-            </a:r>
-            <a:r>
-              <a:rPr lang="en-US" sz="900" dirty="0">
-                <a:solidFill>
-                  <a:srgbClr val="CCCCCC"/>
-                </a:solidFill>
-                <a:latin typeface="Courier New" pitchFamily="34" charset="0"/>
-                <a:ea typeface="Courier New" pitchFamily="34" charset="-122"/>
-                <a:cs typeface="Courier New" pitchFamily="34" charset="-120"/>
-              </a:rPr>
-              <a:t>b</a:t>
-            </a:r>
-            <a:r>
-              <a:rPr lang="en-US" sz="900" dirty="0">
-                <a:solidFill>
-                  <a:srgbClr val="CCCCCC"/>
-                </a:solidFill>
-                <a:latin typeface="Courier New" pitchFamily="34" charset="0"/>
-                <a:ea typeface="Courier New" pitchFamily="34" charset="-122"/>
-                <a:cs typeface="Courier New" pitchFamily="34" charset="-120"/>
-              </a:rPr>
-              <a:t> </a:t>
-            </a:r>
-            <a:r>
-              <a:rPr lang="en-US" sz="900" dirty="0">
-                <a:solidFill>
-                  <a:srgbClr val="CCCCCC"/>
-                </a:solidFill>
-                <a:latin typeface="Courier New" pitchFamily="34" charset="0"/>
-                <a:ea typeface="Courier New" pitchFamily="34" charset="-122"/>
-                <a:cs typeface="Courier New" pitchFamily="34" charset="-120"/>
-              </a:rPr>
-              <a:t>=</a:t>
-            </a:r>
-            <a:r>
-              <a:rPr lang="en-US" sz="900" dirty="0">
-                <a:solidFill>
-                  <a:srgbClr val="CCCCCC"/>
-                </a:solidFill>
-                <a:latin typeface="Courier New" pitchFamily="34" charset="0"/>
-                <a:ea typeface="Courier New" pitchFamily="34" charset="-122"/>
-                <a:cs typeface="Courier New" pitchFamily="34" charset="-120"/>
-              </a:rPr>
-              <a:t> </a:t>
-            </a:r>
-            <a:r>
-              <a:rPr lang="en-US" sz="900" dirty="0">
-                <a:solidFill>
-                  <a:srgbClr val="B5CEA8"/>
-                </a:solidFill>
-                <a:latin typeface="Courier New" pitchFamily="34" charset="0"/>
-                <a:ea typeface="Courier New" pitchFamily="34" charset="-122"/>
-                <a:cs typeface="Courier New" pitchFamily="34" charset="-120"/>
-              </a:rPr>
-              <a:t>0</a:t>
-            </a:r>
-            <a:r>
-              <a:rPr lang="en-US" sz="900" dirty="0">
-                <a:solidFill>
-                  <a:srgbClr val="CCCCCC"/>
-                </a:solidFill>
-                <a:latin typeface="Courier New" pitchFamily="34" charset="0"/>
-                <a:ea typeface="Courier New" pitchFamily="34" charset="-122"/>
-                <a:cs typeface="Courier New" pitchFamily="34" charset="-120"/>
-              </a:rPr>
-              <a:t> </a:t>
-            </a:r>
-            <a:r>
-              <a:rPr lang="en-US" sz="900" dirty="0">
-                <a:solidFill>
-                  <a:srgbClr val="CCCCCC"/>
-                </a:solidFill>
-                <a:latin typeface="Courier New" pitchFamily="34" charset="0"/>
-                <a:ea typeface="Courier New" pitchFamily="34" charset="-122"/>
-                <a:cs typeface="Courier New" pitchFamily="34" charset="-120"/>
-              </a:rPr>
               <a:t>)</a:t>
-            </a:r>
-            <a:r>
-              <a:rPr lang="en-US" sz="900" dirty="0">
-                <a:solidFill>
-                  <a:srgbClr val="CCCCCC"/>
-                </a:solidFill>
-                <a:latin typeface="Courier New" pitchFamily="34" charset="0"/>
-                <a:ea typeface="Courier New" pitchFamily="34" charset="-122"/>
-                <a:cs typeface="Courier New" pitchFamily="34" charset="-120"/>
-              </a:rPr>
-              <a:t>.</a:t>
-            </a:r>
-            <a:endParaRPr lang="en-US" sz="900" dirty="0"/>
-          </a:p>
-          <a:p>
-            <a:pPr indent="0" marL="0">
-              <a:lnSpc>
-                <a:spcPct val="105000"/>
-              </a:lnSpc>
-              <a:buNone/>
-            </a:pPr>
-            <a:r>
-              <a:rPr lang="en-US" sz="900" dirty="0">
-                <a:solidFill>
-                  <a:srgbClr val="CCCCCC"/>
-                </a:solidFill>
-                <a:latin typeface="Courier New" pitchFamily="34" charset="0"/>
-                <a:ea typeface="Courier New" pitchFamily="34" charset="-122"/>
-                <a:cs typeface="Courier New" pitchFamily="34" charset="-120"/>
-              </a:rPr>
-              <a:t>        </a:t>
-            </a:r>
-            <a:r>
-              <a:rPr lang="en-US" sz="900" dirty="0">
-                <a:solidFill>
-                  <a:srgbClr val="4EC9B0"/>
-                </a:solidFill>
-                <a:latin typeface="Courier New" pitchFamily="34" charset="0"/>
-                <a:ea typeface="Courier New" pitchFamily="34" charset="-122"/>
-                <a:cs typeface="Courier New" pitchFamily="34" charset="-120"/>
-              </a:rPr>
-              <a:t>cl_abap_unit_assert=&gt;</a:t>
-            </a:r>
-            <a:r>
-              <a:rPr lang="en-US" sz="900" dirty="0">
-                <a:solidFill>
-                  <a:srgbClr val="CCCCCC"/>
-                </a:solidFill>
-                <a:latin typeface="Courier New" pitchFamily="34" charset="0"/>
-                <a:ea typeface="Courier New" pitchFamily="34" charset="-122"/>
-                <a:cs typeface="Courier New" pitchFamily="34" charset="-120"/>
-              </a:rPr>
-              <a:t>fail</a:t>
-            </a:r>
-            <a:r>
-              <a:rPr lang="en-US" sz="900" dirty="0">
-                <a:solidFill>
-                  <a:srgbClr val="CCCCCC"/>
-                </a:solidFill>
-                <a:latin typeface="Courier New" pitchFamily="34" charset="0"/>
-                <a:ea typeface="Courier New" pitchFamily="34" charset="-122"/>
-                <a:cs typeface="Courier New" pitchFamily="34" charset="-120"/>
-              </a:rPr>
-              <a:t>(</a:t>
-            </a:r>
-            <a:r>
-              <a:rPr lang="en-US" sz="900" dirty="0">
-                <a:solidFill>
-                  <a:srgbClr val="CCCCCC"/>
-                </a:solidFill>
-                <a:latin typeface="Courier New" pitchFamily="34" charset="0"/>
-                <a:ea typeface="Courier New" pitchFamily="34" charset="-122"/>
-                <a:cs typeface="Courier New" pitchFamily="34" charset="-120"/>
-              </a:rPr>
-              <a:t> </a:t>
-            </a:r>
-            <a:r>
-              <a:rPr lang="en-US" sz="900" dirty="0">
-                <a:solidFill>
-                  <a:srgbClr val="CE9178"/>
-                </a:solidFill>
-                <a:latin typeface="Courier New" pitchFamily="34" charset="0"/>
-                <a:ea typeface="Courier New" pitchFamily="34" charset="-122"/>
-                <a:cs typeface="Courier New" pitchFamily="34" charset="-120"/>
-              </a:rPr>
-              <a:t>`Exceção esperada`</a:t>
-            </a:r>
-            <a:r>
-              <a:rPr lang="en-US" sz="900" dirty="0">
-                <a:solidFill>
-                  <a:srgbClr val="CCCCCC"/>
-                </a:solidFill>
-                <a:latin typeface="Courier New" pitchFamily="34" charset="0"/>
-                <a:ea typeface="Courier New" pitchFamily="34" charset="-122"/>
-                <a:cs typeface="Courier New" pitchFamily="34" charset="-120"/>
-              </a:rPr>
-              <a:t> </a:t>
-            </a:r>
-            <a:r>
-              <a:rPr lang="en-US" sz="900" dirty="0">
-                <a:solidFill>
-                  <a:srgbClr val="CCCCCC"/>
-                </a:solidFill>
-                <a:latin typeface="Courier New" pitchFamily="34" charset="0"/>
-                <a:ea typeface="Courier New" pitchFamily="34" charset="-122"/>
-                <a:cs typeface="Courier New" pitchFamily="34" charset="-120"/>
-              </a:rPr>
-              <a:t>)</a:t>
-            </a:r>
-            <a:r>
-              <a:rPr lang="en-US" sz="900" dirty="0">
-                <a:solidFill>
-                  <a:srgbClr val="CCCCCC"/>
-                </a:solidFill>
-                <a:latin typeface="Courier New" pitchFamily="34" charset="0"/>
-                <a:ea typeface="Courier New" pitchFamily="34" charset="-122"/>
-                <a:cs typeface="Courier New" pitchFamily="34" charset="-120"/>
-              </a:rPr>
-              <a:t>.</a:t>
-            </a:r>
-            <a:endParaRPr lang="en-US" sz="900" dirty="0"/>
-          </a:p>
-          <a:p>
-            <a:pPr indent="0" marL="0">
-              <a:lnSpc>
-                <a:spcPct val="105000"/>
-              </a:lnSpc>
-              <a:buNone/>
-            </a:pPr>
-            <a:r>
-              <a:rPr lang="en-US" sz="900" dirty="0">
-                <a:solidFill>
-                  <a:srgbClr val="CCCCCC"/>
-                </a:solidFill>
-                <a:latin typeface="Courier New" pitchFamily="34" charset="0"/>
-                <a:ea typeface="Courier New" pitchFamily="34" charset="-122"/>
-                <a:cs typeface="Courier New" pitchFamily="34" charset="-120"/>
-              </a:rPr>
-              <a:t>      </a:t>
-            </a:r>
-            <a:r>
-              <a:rPr lang="en-US" sz="900" dirty="0">
-                <a:solidFill>
-                  <a:srgbClr val="569CD6"/>
-                </a:solidFill>
-                <a:latin typeface="Courier New" pitchFamily="34" charset="0"/>
-                <a:ea typeface="Courier New" pitchFamily="34" charset="-122"/>
-                <a:cs typeface="Courier New" pitchFamily="34" charset="-120"/>
-              </a:rPr>
-              <a:t>CATCH</a:t>
-            </a:r>
-            <a:r>
-              <a:rPr lang="en-US" sz="900" dirty="0">
-                <a:solidFill>
-                  <a:srgbClr val="CCCCCC"/>
-                </a:solidFill>
-                <a:latin typeface="Courier New" pitchFamily="34" charset="0"/>
-                <a:ea typeface="Courier New" pitchFamily="34" charset="-122"/>
-                <a:cs typeface="Courier New" pitchFamily="34" charset="-120"/>
-              </a:rPr>
-              <a:t> </a:t>
-            </a:r>
-            <a:r>
-              <a:rPr lang="en-US" sz="900" dirty="0">
-                <a:solidFill>
-                  <a:srgbClr val="4EC9B0"/>
-                </a:solidFill>
-                <a:latin typeface="Courier New" pitchFamily="34" charset="0"/>
-                <a:ea typeface="Courier New" pitchFamily="34" charset="-122"/>
-                <a:cs typeface="Courier New" pitchFamily="34" charset="-120"/>
-              </a:rPr>
-              <a:t>cx_sy_zerodivide</a:t>
-            </a:r>
-            <a:r>
-              <a:rPr lang="en-US" sz="900" dirty="0">
-                <a:solidFill>
-                  <a:srgbClr val="CCCCCC"/>
-                </a:solidFill>
-                <a:latin typeface="Courier New" pitchFamily="34" charset="0"/>
-                <a:ea typeface="Courier New" pitchFamily="34" charset="-122"/>
-                <a:cs typeface="Courier New" pitchFamily="34" charset="-120"/>
-              </a:rPr>
-              <a:t>.</a:t>
-            </a:r>
-            <a:endParaRPr lang="en-US" sz="900" dirty="0"/>
-          </a:p>
-          <a:p>
-            <a:pPr indent="0" marL="0">
-              <a:lnSpc>
-                <a:spcPct val="105000"/>
-              </a:lnSpc>
-              <a:buNone/>
-            </a:pPr>
-            <a:r>
-              <a:rPr lang="en-US" sz="900" dirty="0">
-                <a:solidFill>
-                  <a:srgbClr val="CCCCCC"/>
-                </a:solidFill>
-                <a:latin typeface="Courier New" pitchFamily="34" charset="0"/>
-                <a:ea typeface="Courier New" pitchFamily="34" charset="-122"/>
-                <a:cs typeface="Courier New" pitchFamily="34" charset="-120"/>
-              </a:rPr>
-              <a:t>    </a:t>
-            </a:r>
-            <a:r>
-              <a:rPr lang="en-US" sz="900" dirty="0">
-                <a:solidFill>
-                  <a:srgbClr val="569CD6"/>
-                </a:solidFill>
-                <a:latin typeface="Courier New" pitchFamily="34" charset="0"/>
-                <a:ea typeface="Courier New" pitchFamily="34" charset="-122"/>
-                <a:cs typeface="Courier New" pitchFamily="34" charset="-120"/>
-              </a:rPr>
-              <a:t>ENDTRY</a:t>
             </a:r>
             <a:r>
               <a:rPr lang="en-US" sz="900" dirty="0">
@@ -15269,14 +14588,19 @@
           <a:lstStyle/>
           <a:p>
             <a:pPr indent="0" marL="0">
-              <a:spcAft>
-                <a:spcPts val="300"/>
-              </a:spcAft>
               <a:buNone/>
             </a:pPr>
             <a:r>
               <a:rPr lang="en-US" sz="1250" b="1" dirty="0">
                 <a:solidFill>
+                  <a:srgbClr val="1D2D3E"/>
+                </a:solidFill>
+              </a:rPr>
+              <a:t>Sem </a:t>
+            </a:r>
+            <a:r>
+              <a:rPr lang="en-US" sz="1250" b="1" dirty="0">
+                <a:solidFill>
                   <a:srgbClr val="0064D9"/>
                 </a:solidFill>
                 <a:latin typeface="Courier New" pitchFamily="34" charset="0"/>
@@ -15294,10 +14618,40 @@
             <a:r>
               <a:rPr lang="en-US" sz="1050" dirty="0">
                 <a:solidFill>
+                  <a:srgbClr val="0064D9"/>
+                </a:solidFill>
+                <a:latin typeface="Courier New" pitchFamily="34" charset="0"/>
+                <a:ea typeface="Courier New" pitchFamily="34" charset="-122"/>
+                <a:cs typeface="Courier New" pitchFamily="34" charset="-120"/>
+              </a:rPr>
+              <a:t>ZCL_PC_UTIL</a:t>
+            </a:r>
+            <a:r>
+              <a:rPr lang="en-US" sz="1050" dirty="0">
+                <a:solidFill>
                   <a:srgbClr val="556B82"/>
                 </a:solidFill>
               </a:rPr>
-              <a:t>Roda antes de cada teste e cria um objeto novo.</a:t>
+              <a:t> não guarda estado: o teste chama a classe direto. Com estado, crie o objeto em </a:t>
+            </a:r>
+            <a:r>
+              <a:rPr lang="en-US" sz="1050" dirty="0">
+                <a:solidFill>
+                  <a:srgbClr val="0064D9"/>
+                </a:solidFill>
+                <a:latin typeface="Courier New" pitchFamily="34" charset="0"/>
+                <a:ea typeface="Courier New" pitchFamily="34" charset="-122"/>
+                <a:cs typeface="Courier New" pitchFamily="34" charset="-120"/>
+              </a:rPr>
+              <a:t>setup</a:t>
+            </a:r>
+            <a:r>
+              <a:rPr lang="en-US" sz="1050" dirty="0">
+                <a:solidFill>
+                  <a:srgbClr val="556B82"/>
+                </a:solidFill>
+              </a:rPr>
+              <a:t>, que roda antes de cada teste.</a:t>
             </a:r>
             <a:endParaRPr lang="en-US" sz="1400" dirty="0"/>
           </a:p>
@@ -16198,7 +15552,7 @@
         </p:blipFill>
         <p:spPr>
           <a:xfrm>
-            <a:off x="6511900" y="2694432"/>
+            <a:off x="3681146" y="2694432"/>
             <a:ext cx="256032" cy="256032"/>
           </a:xfrm>
           <a:prstGeom prst="rect">
@@ -16246,7 +15600,7 @@
         </p:blipFill>
         <p:spPr>
           <a:xfrm>
-            <a:off x="3681146" y="2694432"/>
+            <a:off x="6511900" y="2694432"/>
             <a:ext cx="256032" cy="256032"/>
           </a:xfrm>
           <a:prstGeom prst="rect">
